--- a/public/lessons/year-6-maths/spring/week-11/generate-equivalent-fractions/teaching-powerpoint-v1.pptx
+++ b/public/lessons/year-6-maths/spring/week-11/generate-equivalent-fractions/teaching-powerpoint-v1.pptx
@@ -2,24 +2,24 @@
 <file path=ppt/presentation.xml><?xml version="1.0" encoding="utf-8"?>
 <p:presentation xmlns:p="http://schemas.openxmlformats.org/presentationml/2006/main">
   <p:sldMasterIdLst>
-    <p:sldMasterId xmlns:r="http://schemas.openxmlformats.org/officeDocument/2006/relationships" id="2147483648" r:id="Re057c4cbb40d4c67"/>
+    <p:sldMasterId xmlns:r="http://schemas.openxmlformats.org/officeDocument/2006/relationships" id="2147483648" r:id="R5847fff384f34a90"/>
   </p:sldMasterIdLst>
   <p:notesMasterIdLst>
-    <p:notesMasterId xmlns:r="http://schemas.openxmlformats.org/officeDocument/2006/relationships" r:id="R1d3d5c90cf0f4800"/>
+    <p:notesMasterId xmlns:r="http://schemas.openxmlformats.org/officeDocument/2006/relationships" r:id="Ra69d50386a53460d"/>
   </p:notesMasterIdLst>
   <p:sldIdLst>
-    <p:sldId xmlns:r="http://schemas.openxmlformats.org/officeDocument/2006/relationships" id="256" r:id="R1bc2343f0caf48f1"/>
-    <p:sldId xmlns:r="http://schemas.openxmlformats.org/officeDocument/2006/relationships" id="257" r:id="Rec8e8c2d8c1d4aed"/>
-    <p:sldId xmlns:r="http://schemas.openxmlformats.org/officeDocument/2006/relationships" id="258" r:id="Re9f1dfb3913a4fa8"/>
-    <p:sldId xmlns:r="http://schemas.openxmlformats.org/officeDocument/2006/relationships" id="259" r:id="Rbee81ff6c24a4439"/>
-    <p:sldId xmlns:r="http://schemas.openxmlformats.org/officeDocument/2006/relationships" id="260" r:id="Rf66371f56f24481e"/>
-    <p:sldId xmlns:r="http://schemas.openxmlformats.org/officeDocument/2006/relationships" id="261" r:id="Rc9e68252999240c3"/>
-    <p:sldId xmlns:r="http://schemas.openxmlformats.org/officeDocument/2006/relationships" id="262" r:id="R04817700a2e14d4d"/>
-    <p:sldId xmlns:r="http://schemas.openxmlformats.org/officeDocument/2006/relationships" id="263" r:id="Ra3899e748c604a09"/>
-    <p:sldId xmlns:r="http://schemas.openxmlformats.org/officeDocument/2006/relationships" id="264" r:id="Rf52b6b84cbbb4f2c"/>
-    <p:sldId xmlns:r="http://schemas.openxmlformats.org/officeDocument/2006/relationships" id="265" r:id="R5b5829cb98c94611"/>
-    <p:sldId xmlns:r="http://schemas.openxmlformats.org/officeDocument/2006/relationships" id="266" r:id="R644005c65dd34794"/>
-    <p:sldId xmlns:r="http://schemas.openxmlformats.org/officeDocument/2006/relationships" id="267" r:id="R111524d91238417b"/>
+    <p:sldId xmlns:r="http://schemas.openxmlformats.org/officeDocument/2006/relationships" id="256" r:id="R2b9d42b73a874f3f"/>
+    <p:sldId xmlns:r="http://schemas.openxmlformats.org/officeDocument/2006/relationships" id="257" r:id="R706579255bab46e3"/>
+    <p:sldId xmlns:r="http://schemas.openxmlformats.org/officeDocument/2006/relationships" id="258" r:id="R5091c0cf761d439b"/>
+    <p:sldId xmlns:r="http://schemas.openxmlformats.org/officeDocument/2006/relationships" id="259" r:id="R31b3fe45f8c84eea"/>
+    <p:sldId xmlns:r="http://schemas.openxmlformats.org/officeDocument/2006/relationships" id="260" r:id="Rd28603f71a744fc0"/>
+    <p:sldId xmlns:r="http://schemas.openxmlformats.org/officeDocument/2006/relationships" id="261" r:id="Rf3c72080bae649a1"/>
+    <p:sldId xmlns:r="http://schemas.openxmlformats.org/officeDocument/2006/relationships" id="262" r:id="Rc430015abdd64687"/>
+    <p:sldId xmlns:r="http://schemas.openxmlformats.org/officeDocument/2006/relationships" id="263" r:id="R1dfb747131b34d1e"/>
+    <p:sldId xmlns:r="http://schemas.openxmlformats.org/officeDocument/2006/relationships" id="264" r:id="R1dcff0cd8550474e"/>
+    <p:sldId xmlns:r="http://schemas.openxmlformats.org/officeDocument/2006/relationships" id="265" r:id="R9bc444c750e34b8c"/>
+    <p:sldId xmlns:r="http://schemas.openxmlformats.org/officeDocument/2006/relationships" id="266" r:id="Rcb02d3ef81144eef"/>
+    <p:sldId xmlns:r="http://schemas.openxmlformats.org/officeDocument/2006/relationships" id="267" r:id="R40057904e31e4f4d"/>
   </p:sldIdLst>
   <p:sldSz cx="12192000" cy="6858000"/>
   <p:notesSz cx="6858000" cy="9144000"/>
@@ -873,7 +873,7 @@
           <a:lstStyle xmlns:a="http://schemas.openxmlformats.org/drawingml/2006/main"/>
           <a:p xmlns:a="http://schemas.openxmlformats.org/drawingml/2006/main">
             <a:r>
-              <a:t>I do. Reveal the question, setup and each calculation stage one click at a time. Pupils watch before copying. Model answer: 20/24.</a:t>
+              <a:t>I do. Reveal the question, then reveal each mathematical change one click at a time. Point to the numbers and operation that changed before moving to the next line. Final answer: 20/24.</a:t>
             </a:r>
           </a:p>
         </p:txBody>
@@ -1291,7 +1291,7 @@
   </p:cSld>
   <p:clrMap bg1="lt1" tx1="dk1" bg2="lt2" tx2="dk2" accent1="accent1" accent2="accent2" accent3="accent3" accent4="accent4" accent5="accent5" accent6="accent6" hlink="hlink" folHlink="folHlink"/>
   <p:sldLayoutIdLst>
-    <p:sldLayoutId xmlns:r="http://schemas.openxmlformats.org/officeDocument/2006/relationships" id="2147483649" r:id="R8d36106864894676"/>
+    <p:sldLayoutId xmlns:r="http://schemas.openxmlformats.org/officeDocument/2006/relationships" id="2147483649" r:id="R5214860911b24a5c"/>
   </p:sldLayoutIdLst>
   <p:txStyles>
     <p:titleStyle>
@@ -1842,7 +1842,7 @@
           <p:cNvPr id="12" name="">
             <a:extLst xmlns:a="http://schemas.openxmlformats.org/drawingml/2006/main">
               <a:ext uri="{FF2B5EF4-FFF2-40B4-BE49-F238E27FC236}">
-                <a16:creationId xmlns:a16="http://schemas.microsoft.com/office/drawing/2014/main" id="{15C4BF1B-BED5-4109-B881-F85143BC9F44}"/>
+                <a16:creationId xmlns:a16="http://schemas.microsoft.com/office/drawing/2014/main" id="{81B027A7-0699-4D42-9480-840C22BB721E}"/>
               </a:ext>
             </a:extLst>
           </p:cNvPr>
@@ -1874,7 +1874,7 @@
           <p:cNvPr id="2" name="">
             <a:extLst xmlns:a="http://schemas.openxmlformats.org/drawingml/2006/main">
               <a:ext uri="{FF2B5EF4-FFF2-40B4-BE49-F238E27FC236}">
-                <a16:creationId xmlns:a16="http://schemas.microsoft.com/office/drawing/2014/main" id="{B6DDB6D7-D15A-4B96-9041-7AA114AC2034}"/>
+                <a16:creationId xmlns:a16="http://schemas.microsoft.com/office/drawing/2014/main" id="{905F8E40-A325-4CD5-A252-3296A19627FE}"/>
               </a:ext>
             </a:extLst>
           </p:cNvPr>
@@ -1931,7 +1931,7 @@
           <p:cNvPr id="3" name="">
             <a:extLst xmlns:a="http://schemas.openxmlformats.org/drawingml/2006/main">
               <a:ext uri="{FF2B5EF4-FFF2-40B4-BE49-F238E27FC236}">
-                <a16:creationId xmlns:a16="http://schemas.microsoft.com/office/drawing/2014/main" id="{BBBF9A5A-9AE6-4B07-9019-FE0FFF4BDC47}"/>
+                <a16:creationId xmlns:a16="http://schemas.microsoft.com/office/drawing/2014/main" id="{7A2A4335-849C-495B-B7FE-201071AAA726}"/>
               </a:ext>
             </a:extLst>
           </p:cNvPr>
@@ -1965,7 +1965,7 @@
           <p:cNvPr id="4" name="">
             <a:extLst xmlns:a="http://schemas.openxmlformats.org/drawingml/2006/main">
               <a:ext uri="{FF2B5EF4-FFF2-40B4-BE49-F238E27FC236}">
-                <a16:creationId xmlns:a16="http://schemas.microsoft.com/office/drawing/2014/main" id="{DE792179-629E-48D1-B415-AA5F0E01BD9E}"/>
+                <a16:creationId xmlns:a16="http://schemas.microsoft.com/office/drawing/2014/main" id="{58FBB5AA-E533-4EAD-9B29-64CAB6EB88EC}"/>
               </a:ext>
             </a:extLst>
           </p:cNvPr>
@@ -2022,7 +2022,7 @@
           <p:cNvPr id="5" name="">
             <a:extLst xmlns:a="http://schemas.openxmlformats.org/drawingml/2006/main">
               <a:ext uri="{FF2B5EF4-FFF2-40B4-BE49-F238E27FC236}">
-                <a16:creationId xmlns:a16="http://schemas.microsoft.com/office/drawing/2014/main" id="{21E91467-E05F-481F-BE88-F47318B4440F}"/>
+                <a16:creationId xmlns:a16="http://schemas.microsoft.com/office/drawing/2014/main" id="{8191F96F-B503-4B7D-9C32-83A6A057B4BF}"/>
               </a:ext>
             </a:extLst>
           </p:cNvPr>
@@ -2079,7 +2079,7 @@
           <p:cNvPr id="6" name="">
             <a:extLst xmlns:a="http://schemas.openxmlformats.org/drawingml/2006/main">
               <a:ext uri="{FF2B5EF4-FFF2-40B4-BE49-F238E27FC236}">
-                <a16:creationId xmlns:a16="http://schemas.microsoft.com/office/drawing/2014/main" id="{1F2E5A4F-221B-4952-BB82-2A4DA26C4606}"/>
+                <a16:creationId xmlns:a16="http://schemas.microsoft.com/office/drawing/2014/main" id="{7D9FF5CE-96E9-44E6-8DC9-796E0DA17E52}"/>
               </a:ext>
             </a:extLst>
           </p:cNvPr>
@@ -2113,7 +2113,7 @@
           <p:cNvPr id="7" name="">
             <a:extLst xmlns:a="http://schemas.openxmlformats.org/drawingml/2006/main">
               <a:ext uri="{FF2B5EF4-FFF2-40B4-BE49-F238E27FC236}">
-                <a16:creationId xmlns:a16="http://schemas.microsoft.com/office/drawing/2014/main" id="{F8B3DFF1-53D7-4F48-BA74-A1D9716F83E5}"/>
+                <a16:creationId xmlns:a16="http://schemas.microsoft.com/office/drawing/2014/main" id="{8AF077DE-464C-49FB-9CCB-BD71BB6A643E}"/>
               </a:ext>
             </a:extLst>
           </p:cNvPr>
@@ -2170,7 +2170,7 @@
           <p:cNvPr id="8" name="">
             <a:extLst xmlns:a="http://schemas.openxmlformats.org/drawingml/2006/main">
               <a:ext uri="{FF2B5EF4-FFF2-40B4-BE49-F238E27FC236}">
-                <a16:creationId xmlns:a16="http://schemas.microsoft.com/office/drawing/2014/main" id="{8DCA5A99-825C-4FB6-B240-8F791DDD92D5}"/>
+                <a16:creationId xmlns:a16="http://schemas.microsoft.com/office/drawing/2014/main" id="{28F576A8-2575-483F-9F6A-1BB41A3CF4AC}"/>
               </a:ext>
             </a:extLst>
           </p:cNvPr>
@@ -2227,7 +2227,7 @@
           <p:cNvPr id="9" name="">
             <a:extLst xmlns:a="http://schemas.openxmlformats.org/drawingml/2006/main">
               <a:ext uri="{FF2B5EF4-FFF2-40B4-BE49-F238E27FC236}">
-                <a16:creationId xmlns:a16="http://schemas.microsoft.com/office/drawing/2014/main" id="{AD71CD00-5C3F-48D7-8308-2EEDD13E4034}"/>
+                <a16:creationId xmlns:a16="http://schemas.microsoft.com/office/drawing/2014/main" id="{C44147E4-2F12-4E70-8BDD-9AAFFDC919E4}"/>
               </a:ext>
             </a:extLst>
           </p:cNvPr>
@@ -2284,7 +2284,7 @@
           <p:cNvPr id="10" name="">
             <a:extLst xmlns:a="http://schemas.openxmlformats.org/drawingml/2006/main">
               <a:ext uri="{FF2B5EF4-FFF2-40B4-BE49-F238E27FC236}">
-                <a16:creationId xmlns:a16="http://schemas.microsoft.com/office/drawing/2014/main" id="{B0E660AC-F666-406A-B386-081FE06A5107}"/>
+                <a16:creationId xmlns:a16="http://schemas.microsoft.com/office/drawing/2014/main" id="{E02A0A35-E447-404E-96D1-B1BFBFCA3E02}"/>
               </a:ext>
             </a:extLst>
           </p:cNvPr>
@@ -2341,7 +2341,7 @@
           <p:cNvPr id="11" name="">
             <a:extLst xmlns:a="http://schemas.openxmlformats.org/drawingml/2006/main">
               <a:ext uri="{FF2B5EF4-FFF2-40B4-BE49-F238E27FC236}">
-                <a16:creationId xmlns:a16="http://schemas.microsoft.com/office/drawing/2014/main" id="{B57A071C-0B93-4E57-8694-C578E3DDB1E6}"/>
+                <a16:creationId xmlns:a16="http://schemas.microsoft.com/office/drawing/2014/main" id="{B428C0B4-1E6C-417F-8ED9-822E9C11F277}"/>
               </a:ext>
             </a:extLst>
           </p:cNvPr>
@@ -2396,7 +2396,7 @@
     </p:spTree>
     <p:extLst>
       <p:ext uri="{BB962C8B-B14F-4D97-AF65-F5344CB8AC3E}">
-        <p14:creationId xmlns:p14="http://schemas.microsoft.com/office/powerpoint/2010/main" val="4087304"/>
+        <p14:creationId xmlns:p14="http://schemas.microsoft.com/office/powerpoint/2010/main" val="1763119565"/>
       </p:ext>
     </p:extLst>
   </p:cSld>
@@ -2427,7 +2427,7 @@
           <p:cNvPr id="14" name="">
             <a:extLst xmlns:a="http://schemas.openxmlformats.org/drawingml/2006/main">
               <a:ext uri="{FF2B5EF4-FFF2-40B4-BE49-F238E27FC236}">
-                <a16:creationId xmlns:a16="http://schemas.microsoft.com/office/drawing/2014/main" id="{EED3659D-6EFF-42EB-94A7-6844852A6506}"/>
+                <a16:creationId xmlns:a16="http://schemas.microsoft.com/office/drawing/2014/main" id="{DB82409A-EBCF-48A0-B5AF-F65A0CCB220D}"/>
               </a:ext>
             </a:extLst>
           </p:cNvPr>
@@ -2459,7 +2459,7 @@
           <p:cNvPr id="2" name="">
             <a:extLst xmlns:a="http://schemas.openxmlformats.org/drawingml/2006/main">
               <a:ext uri="{FF2B5EF4-FFF2-40B4-BE49-F238E27FC236}">
-                <a16:creationId xmlns:a16="http://schemas.microsoft.com/office/drawing/2014/main" id="{6090EC82-0D0E-4827-BFE1-5E7A73716DB8}"/>
+                <a16:creationId xmlns:a16="http://schemas.microsoft.com/office/drawing/2014/main" id="{C330C481-A102-4084-BEDC-3FD909A56066}"/>
               </a:ext>
             </a:extLst>
           </p:cNvPr>
@@ -2516,7 +2516,7 @@
           <p:cNvPr id="3" name="">
             <a:extLst xmlns:a="http://schemas.openxmlformats.org/drawingml/2006/main">
               <a:ext uri="{FF2B5EF4-FFF2-40B4-BE49-F238E27FC236}">
-                <a16:creationId xmlns:a16="http://schemas.microsoft.com/office/drawing/2014/main" id="{5B4E268E-7931-47A4-B5EA-760B3452D990}"/>
+                <a16:creationId xmlns:a16="http://schemas.microsoft.com/office/drawing/2014/main" id="{4A8E3EF9-5228-41E1-AFEB-C64160254540}"/>
               </a:ext>
             </a:extLst>
           </p:cNvPr>
@@ -2548,7 +2548,7 @@
           <p:cNvPr id="4" name="">
             <a:extLst xmlns:a="http://schemas.openxmlformats.org/drawingml/2006/main">
               <a:ext uri="{FF2B5EF4-FFF2-40B4-BE49-F238E27FC236}">
-                <a16:creationId xmlns:a16="http://schemas.microsoft.com/office/drawing/2014/main" id="{4474E05B-20D6-4F43-8279-20842BA51FC2}"/>
+                <a16:creationId xmlns:a16="http://schemas.microsoft.com/office/drawing/2014/main" id="{0DDBD0FC-BC23-4334-ABDA-9708BD3FAAAB}"/>
               </a:ext>
             </a:extLst>
           </p:cNvPr>
@@ -2605,7 +2605,7 @@
           <p:cNvPr id="5" name="">
             <a:extLst xmlns:a="http://schemas.openxmlformats.org/drawingml/2006/main">
               <a:ext uri="{FF2B5EF4-FFF2-40B4-BE49-F238E27FC236}">
-                <a16:creationId xmlns:a16="http://schemas.microsoft.com/office/drawing/2014/main" id="{F620A9D3-7762-414B-9351-56084BF1AE40}"/>
+                <a16:creationId xmlns:a16="http://schemas.microsoft.com/office/drawing/2014/main" id="{5C6273F9-0B7F-4D2D-95F7-9E0C3399C899}"/>
               </a:ext>
             </a:extLst>
           </p:cNvPr>
@@ -2662,7 +2662,7 @@
           <p:cNvPr id="6" name="">
             <a:extLst xmlns:a="http://schemas.openxmlformats.org/drawingml/2006/main">
               <a:ext uri="{FF2B5EF4-FFF2-40B4-BE49-F238E27FC236}">
-                <a16:creationId xmlns:a16="http://schemas.microsoft.com/office/drawing/2014/main" id="{9E9B0CA7-EE0B-4C56-9654-2A6D10F0C899}"/>
+                <a16:creationId xmlns:a16="http://schemas.microsoft.com/office/drawing/2014/main" id="{7D695064-D0F2-4D89-8732-546403979102}"/>
               </a:ext>
             </a:extLst>
           </p:cNvPr>
@@ -2719,7 +2719,7 @@
           <p:cNvPr id="7" name="">
             <a:extLst xmlns:a="http://schemas.openxmlformats.org/drawingml/2006/main">
               <a:ext uri="{FF2B5EF4-FFF2-40B4-BE49-F238E27FC236}">
-                <a16:creationId xmlns:a16="http://schemas.microsoft.com/office/drawing/2014/main" id="{F9CFA271-FD04-418D-9BFA-452BD6FBB80C}"/>
+                <a16:creationId xmlns:a16="http://schemas.microsoft.com/office/drawing/2014/main" id="{54FEC0EB-3BBB-4820-9EAD-0E9A65005921}"/>
               </a:ext>
             </a:extLst>
           </p:cNvPr>
@@ -2751,7 +2751,7 @@
           <p:cNvPr id="8" name="">
             <a:extLst xmlns:a="http://schemas.openxmlformats.org/drawingml/2006/main">
               <a:ext uri="{FF2B5EF4-FFF2-40B4-BE49-F238E27FC236}">
-                <a16:creationId xmlns:a16="http://schemas.microsoft.com/office/drawing/2014/main" id="{A5DD2E10-DFF7-4E45-B938-B4A46FE886C1}"/>
+                <a16:creationId xmlns:a16="http://schemas.microsoft.com/office/drawing/2014/main" id="{1B1DBEF9-6BC7-4B0C-922C-67D95A064620}"/>
               </a:ext>
             </a:extLst>
           </p:cNvPr>
@@ -2808,7 +2808,7 @@
           <p:cNvPr id="9" name="">
             <a:extLst xmlns:a="http://schemas.openxmlformats.org/drawingml/2006/main">
               <a:ext uri="{FF2B5EF4-FFF2-40B4-BE49-F238E27FC236}">
-                <a16:creationId xmlns:a16="http://schemas.microsoft.com/office/drawing/2014/main" id="{EEFA41D8-7567-462D-89A8-8197C1A6BC10}"/>
+                <a16:creationId xmlns:a16="http://schemas.microsoft.com/office/drawing/2014/main" id="{9A89B4AB-7C3F-4755-8181-09E6CC8B4AB4}"/>
               </a:ext>
             </a:extLst>
           </p:cNvPr>
@@ -2865,7 +2865,7 @@
           <p:cNvPr id="10" name="">
             <a:extLst xmlns:a="http://schemas.openxmlformats.org/drawingml/2006/main">
               <a:ext uri="{FF2B5EF4-FFF2-40B4-BE49-F238E27FC236}">
-                <a16:creationId xmlns:a16="http://schemas.microsoft.com/office/drawing/2014/main" id="{7CC5801C-E96D-4B2C-9675-1C22D138C3B1}"/>
+                <a16:creationId xmlns:a16="http://schemas.microsoft.com/office/drawing/2014/main" id="{A79AB2EE-220A-4568-8919-B20057CC4BD1}"/>
               </a:ext>
             </a:extLst>
           </p:cNvPr>
@@ -2922,7 +2922,7 @@
           <p:cNvPr id="11" name="">
             <a:extLst xmlns:a="http://schemas.openxmlformats.org/drawingml/2006/main">
               <a:ext uri="{FF2B5EF4-FFF2-40B4-BE49-F238E27FC236}">
-                <a16:creationId xmlns:a16="http://schemas.microsoft.com/office/drawing/2014/main" id="{7B4B1D20-598B-4D31-862A-D916874BB177}"/>
+                <a16:creationId xmlns:a16="http://schemas.microsoft.com/office/drawing/2014/main" id="{567A2186-5E47-420E-BD7C-CA02FD09A921}"/>
               </a:ext>
             </a:extLst>
           </p:cNvPr>
@@ -2979,7 +2979,7 @@
           <p:cNvPr id="12" name="">
             <a:extLst xmlns:a="http://schemas.openxmlformats.org/drawingml/2006/main">
               <a:ext uri="{FF2B5EF4-FFF2-40B4-BE49-F238E27FC236}">
-                <a16:creationId xmlns:a16="http://schemas.microsoft.com/office/drawing/2014/main" id="{A38C7D01-2DA8-4B42-ABC7-E88B11E669C7}"/>
+                <a16:creationId xmlns:a16="http://schemas.microsoft.com/office/drawing/2014/main" id="{4FFBBC57-97B8-4B5F-8F8F-F7D560E10967}"/>
               </a:ext>
             </a:extLst>
           </p:cNvPr>
@@ -3036,7 +3036,7 @@
           <p:cNvPr id="13" name="">
             <a:extLst xmlns:a="http://schemas.openxmlformats.org/drawingml/2006/main">
               <a:ext uri="{FF2B5EF4-FFF2-40B4-BE49-F238E27FC236}">
-                <a16:creationId xmlns:a16="http://schemas.microsoft.com/office/drawing/2014/main" id="{E80BEA4A-28FF-4ADD-8179-8AE9B9804D37}"/>
+                <a16:creationId xmlns:a16="http://schemas.microsoft.com/office/drawing/2014/main" id="{1D603A9E-3F46-48CE-8311-5ACCEE72A5C0}"/>
               </a:ext>
             </a:extLst>
           </p:cNvPr>
@@ -3091,7 +3091,7 @@
     </p:spTree>
     <p:extLst>
       <p:ext uri="{BB962C8B-B14F-4D97-AF65-F5344CB8AC3E}">
-        <p14:creationId xmlns:p14="http://schemas.microsoft.com/office/powerpoint/2010/main" val="530007253"/>
+        <p14:creationId xmlns:p14="http://schemas.microsoft.com/office/powerpoint/2010/main" val="1294098786"/>
       </p:ext>
     </p:extLst>
   </p:cSld>
@@ -3292,7 +3292,7 @@
           <p:cNvPr id="19" name="">
             <a:extLst xmlns:a="http://schemas.openxmlformats.org/drawingml/2006/main">
               <a:ext uri="{FF2B5EF4-FFF2-40B4-BE49-F238E27FC236}">
-                <a16:creationId xmlns:a16="http://schemas.microsoft.com/office/drawing/2014/main" id="{12892F8A-A988-464E-BD3C-BAD6D8E33959}"/>
+                <a16:creationId xmlns:a16="http://schemas.microsoft.com/office/drawing/2014/main" id="{622DB512-0E35-4710-996C-A06A274E0D02}"/>
               </a:ext>
             </a:extLst>
           </p:cNvPr>
@@ -3324,7 +3324,7 @@
           <p:cNvPr id="2" name="">
             <a:extLst xmlns:a="http://schemas.openxmlformats.org/drawingml/2006/main">
               <a:ext uri="{FF2B5EF4-FFF2-40B4-BE49-F238E27FC236}">
-                <a16:creationId xmlns:a16="http://schemas.microsoft.com/office/drawing/2014/main" id="{D4C0E05F-D3AF-47CD-BF48-06F76B3C58E7}"/>
+                <a16:creationId xmlns:a16="http://schemas.microsoft.com/office/drawing/2014/main" id="{DA812C6E-919B-4495-A324-7A37951935E0}"/>
               </a:ext>
             </a:extLst>
           </p:cNvPr>
@@ -3381,7 +3381,7 @@
           <p:cNvPr id="3" name="">
             <a:extLst xmlns:a="http://schemas.openxmlformats.org/drawingml/2006/main">
               <a:ext uri="{FF2B5EF4-FFF2-40B4-BE49-F238E27FC236}">
-                <a16:creationId xmlns:a16="http://schemas.microsoft.com/office/drawing/2014/main" id="{54C0FFCE-F73E-4FDF-BC0B-FCB8B189F264}"/>
+                <a16:creationId xmlns:a16="http://schemas.microsoft.com/office/drawing/2014/main" id="{E241BF35-06A9-4109-9D58-7D0E055B0BAB}"/>
               </a:ext>
             </a:extLst>
           </p:cNvPr>
@@ -3413,7 +3413,7 @@
           <p:cNvPr id="4" name="">
             <a:extLst xmlns:a="http://schemas.openxmlformats.org/drawingml/2006/main">
               <a:ext uri="{FF2B5EF4-FFF2-40B4-BE49-F238E27FC236}">
-                <a16:creationId xmlns:a16="http://schemas.microsoft.com/office/drawing/2014/main" id="{990F2B92-74E2-41AC-81F3-9A73C7EA3B6E}"/>
+                <a16:creationId xmlns:a16="http://schemas.microsoft.com/office/drawing/2014/main" id="{40C9824E-06E2-48E4-A152-4198F18C6862}"/>
               </a:ext>
             </a:extLst>
           </p:cNvPr>
@@ -3470,7 +3470,7 @@
           <p:cNvPr id="5" name="">
             <a:extLst xmlns:a="http://schemas.openxmlformats.org/drawingml/2006/main">
               <a:ext uri="{FF2B5EF4-FFF2-40B4-BE49-F238E27FC236}">
-                <a16:creationId xmlns:a16="http://schemas.microsoft.com/office/drawing/2014/main" id="{0FC3332F-AA16-4E3C-9335-48F4B8741EEE}"/>
+                <a16:creationId xmlns:a16="http://schemas.microsoft.com/office/drawing/2014/main" id="{9B44E2E3-1187-4312-ABD0-1B364D3A053E}"/>
               </a:ext>
             </a:extLst>
           </p:cNvPr>
@@ -3527,7 +3527,7 @@
           <p:cNvPr id="6" name="">
             <a:extLst xmlns:a="http://schemas.openxmlformats.org/drawingml/2006/main">
               <a:ext uri="{FF2B5EF4-FFF2-40B4-BE49-F238E27FC236}">
-                <a16:creationId xmlns:a16="http://schemas.microsoft.com/office/drawing/2014/main" id="{C22F2830-3A9E-4E88-A909-01FA975B123D}"/>
+                <a16:creationId xmlns:a16="http://schemas.microsoft.com/office/drawing/2014/main" id="{E0C7A2F6-EC74-4FA7-9937-92BE87E70544}"/>
               </a:ext>
             </a:extLst>
           </p:cNvPr>
@@ -3584,7 +3584,7 @@
           <p:cNvPr id="7" name="">
             <a:extLst xmlns:a="http://schemas.openxmlformats.org/drawingml/2006/main">
               <a:ext uri="{FF2B5EF4-FFF2-40B4-BE49-F238E27FC236}">
-                <a16:creationId xmlns:a16="http://schemas.microsoft.com/office/drawing/2014/main" id="{B2183BB6-9D56-45AC-A23C-7F2B487D66EA}"/>
+                <a16:creationId xmlns:a16="http://schemas.microsoft.com/office/drawing/2014/main" id="{B2B04405-B863-40EF-B600-7A4655C52529}"/>
               </a:ext>
             </a:extLst>
           </p:cNvPr>
@@ -3616,7 +3616,7 @@
           <p:cNvPr id="8" name="">
             <a:extLst xmlns:a="http://schemas.openxmlformats.org/drawingml/2006/main">
               <a:ext uri="{FF2B5EF4-FFF2-40B4-BE49-F238E27FC236}">
-                <a16:creationId xmlns:a16="http://schemas.microsoft.com/office/drawing/2014/main" id="{DCCF680D-DAB9-48EB-AD13-C280D978CB0D}"/>
+                <a16:creationId xmlns:a16="http://schemas.microsoft.com/office/drawing/2014/main" id="{BB60E604-84E7-4DAC-98D5-3166774517AB}"/>
               </a:ext>
             </a:extLst>
           </p:cNvPr>
@@ -3673,7 +3673,7 @@
           <p:cNvPr id="9" name="">
             <a:extLst xmlns:a="http://schemas.openxmlformats.org/drawingml/2006/main">
               <a:ext uri="{FF2B5EF4-FFF2-40B4-BE49-F238E27FC236}">
-                <a16:creationId xmlns:a16="http://schemas.microsoft.com/office/drawing/2014/main" id="{93148B24-FCED-4DA9-881A-11AF6185454D}"/>
+                <a16:creationId xmlns:a16="http://schemas.microsoft.com/office/drawing/2014/main" id="{76FC1E57-22C7-4D47-B9F4-9D07E04C9F49}"/>
               </a:ext>
             </a:extLst>
           </p:cNvPr>
@@ -3730,7 +3730,7 @@
           <p:cNvPr id="10" name="">
             <a:extLst xmlns:a="http://schemas.openxmlformats.org/drawingml/2006/main">
               <a:ext uri="{FF2B5EF4-FFF2-40B4-BE49-F238E27FC236}">
-                <a16:creationId xmlns:a16="http://schemas.microsoft.com/office/drawing/2014/main" id="{5561A5AE-5A73-4D99-BA17-5B5F4DF1145A}"/>
+                <a16:creationId xmlns:a16="http://schemas.microsoft.com/office/drawing/2014/main" id="{8A4C3205-048D-4BE8-A710-F065078D7ECD}"/>
               </a:ext>
             </a:extLst>
           </p:cNvPr>
@@ -3787,7 +3787,7 @@
           <p:cNvPr id="11" name="">
             <a:extLst xmlns:a="http://schemas.openxmlformats.org/drawingml/2006/main">
               <a:ext uri="{FF2B5EF4-FFF2-40B4-BE49-F238E27FC236}">
-                <a16:creationId xmlns:a16="http://schemas.microsoft.com/office/drawing/2014/main" id="{FD4AB15C-B53E-4AA3-B852-E7E3721B0919}"/>
+                <a16:creationId xmlns:a16="http://schemas.microsoft.com/office/drawing/2014/main" id="{62123AF2-E5E3-4F7A-9C79-DE363A5DA44D}"/>
               </a:ext>
             </a:extLst>
           </p:cNvPr>
@@ -3821,7 +3821,7 @@
           <p:cNvPr id="12" name="">
             <a:extLst xmlns:a="http://schemas.openxmlformats.org/drawingml/2006/main">
               <a:ext uri="{FF2B5EF4-FFF2-40B4-BE49-F238E27FC236}">
-                <a16:creationId xmlns:a16="http://schemas.microsoft.com/office/drawing/2014/main" id="{D9D3010A-09BE-4561-908E-0CFD92756CF8}"/>
+                <a16:creationId xmlns:a16="http://schemas.microsoft.com/office/drawing/2014/main" id="{8F2459D5-9444-4E74-BDF9-52937CE0EC53}"/>
               </a:ext>
             </a:extLst>
           </p:cNvPr>
@@ -3878,7 +3878,7 @@
           <p:cNvPr id="13" name="">
             <a:extLst xmlns:a="http://schemas.openxmlformats.org/drawingml/2006/main">
               <a:ext uri="{FF2B5EF4-FFF2-40B4-BE49-F238E27FC236}">
-                <a16:creationId xmlns:a16="http://schemas.microsoft.com/office/drawing/2014/main" id="{7BEB29B5-A2B3-4D0B-AB5E-E907997EC783}"/>
+                <a16:creationId xmlns:a16="http://schemas.microsoft.com/office/drawing/2014/main" id="{40D6DD60-E3BB-4AE4-8118-0FD188EFA5FF}"/>
               </a:ext>
             </a:extLst>
           </p:cNvPr>
@@ -3935,7 +3935,7 @@
           <p:cNvPr id="14" name="">
             <a:extLst xmlns:a="http://schemas.openxmlformats.org/drawingml/2006/main">
               <a:ext uri="{FF2B5EF4-FFF2-40B4-BE49-F238E27FC236}">
-                <a16:creationId xmlns:a16="http://schemas.microsoft.com/office/drawing/2014/main" id="{AF7B79BC-DAF6-4B61-ABFD-5908514CF05C}"/>
+                <a16:creationId xmlns:a16="http://schemas.microsoft.com/office/drawing/2014/main" id="{D578AB69-E75C-41E7-83D0-CE706B53070E}"/>
               </a:ext>
             </a:extLst>
           </p:cNvPr>
@@ -3992,7 +3992,7 @@
           <p:cNvPr id="15" name="">
             <a:extLst xmlns:a="http://schemas.openxmlformats.org/drawingml/2006/main">
               <a:ext uri="{FF2B5EF4-FFF2-40B4-BE49-F238E27FC236}">
-                <a16:creationId xmlns:a16="http://schemas.microsoft.com/office/drawing/2014/main" id="{0B996D1C-B9C6-4F45-82F4-986885C35469}"/>
+                <a16:creationId xmlns:a16="http://schemas.microsoft.com/office/drawing/2014/main" id="{C397774B-6CA0-4D04-A013-C7B3BC1EA562}"/>
               </a:ext>
             </a:extLst>
           </p:cNvPr>
@@ -4026,7 +4026,7 @@
           <p:cNvPr id="16" name="">
             <a:extLst xmlns:a="http://schemas.openxmlformats.org/drawingml/2006/main">
               <a:ext uri="{FF2B5EF4-FFF2-40B4-BE49-F238E27FC236}">
-                <a16:creationId xmlns:a16="http://schemas.microsoft.com/office/drawing/2014/main" id="{24649DC9-AD67-4F56-8F38-4CE6FB853A0F}"/>
+                <a16:creationId xmlns:a16="http://schemas.microsoft.com/office/drawing/2014/main" id="{CFFA1444-A38F-4074-B4F0-A26DBD394B85}"/>
               </a:ext>
             </a:extLst>
           </p:cNvPr>
@@ -4083,7 +4083,7 @@
           <p:cNvPr id="17" name="">
             <a:extLst xmlns:a="http://schemas.openxmlformats.org/drawingml/2006/main">
               <a:ext uri="{FF2B5EF4-FFF2-40B4-BE49-F238E27FC236}">
-                <a16:creationId xmlns:a16="http://schemas.microsoft.com/office/drawing/2014/main" id="{10B3EB85-5DC9-4BE5-A547-57140FD852E6}"/>
+                <a16:creationId xmlns:a16="http://schemas.microsoft.com/office/drawing/2014/main" id="{B249C8EE-6708-4E82-BFD2-4A92EDB46251}"/>
               </a:ext>
             </a:extLst>
           </p:cNvPr>
@@ -4140,7 +4140,7 @@
           <p:cNvPr id="18" name="">
             <a:extLst xmlns:a="http://schemas.openxmlformats.org/drawingml/2006/main">
               <a:ext uri="{FF2B5EF4-FFF2-40B4-BE49-F238E27FC236}">
-                <a16:creationId xmlns:a16="http://schemas.microsoft.com/office/drawing/2014/main" id="{FD4EBF21-640B-4FB2-A2D3-CD3BE9861F13}"/>
+                <a16:creationId xmlns:a16="http://schemas.microsoft.com/office/drawing/2014/main" id="{7FAD4D50-3537-4E38-9D5A-9FE59321A0F7}"/>
               </a:ext>
             </a:extLst>
           </p:cNvPr>
@@ -4195,7 +4195,7 @@
     </p:spTree>
     <p:extLst>
       <p:ext uri="{BB962C8B-B14F-4D97-AF65-F5344CB8AC3E}">
-        <p14:creationId xmlns:p14="http://schemas.microsoft.com/office/powerpoint/2010/main" val="620549116"/>
+        <p14:creationId xmlns:p14="http://schemas.microsoft.com/office/powerpoint/2010/main" val="1571419697"/>
       </p:ext>
     </p:extLst>
   </p:cSld>
@@ -4350,7 +4350,7 @@
           <p:cNvPr id="23" name="">
             <a:extLst xmlns:a="http://schemas.openxmlformats.org/drawingml/2006/main">
               <a:ext uri="{FF2B5EF4-FFF2-40B4-BE49-F238E27FC236}">
-                <a16:creationId xmlns:a16="http://schemas.microsoft.com/office/drawing/2014/main" id="{2A722EE1-5CC9-4D36-A504-040F9D4099E8}"/>
+                <a16:creationId xmlns:a16="http://schemas.microsoft.com/office/drawing/2014/main" id="{2A00FE5F-A685-4D79-950C-D494B2BCAAF4}"/>
               </a:ext>
             </a:extLst>
           </p:cNvPr>
@@ -4382,7 +4382,7 @@
           <p:cNvPr id="2" name="">
             <a:extLst xmlns:a="http://schemas.openxmlformats.org/drawingml/2006/main">
               <a:ext uri="{FF2B5EF4-FFF2-40B4-BE49-F238E27FC236}">
-                <a16:creationId xmlns:a16="http://schemas.microsoft.com/office/drawing/2014/main" id="{3D981583-09C4-4CA5-9750-EDDB1D45A6D0}"/>
+                <a16:creationId xmlns:a16="http://schemas.microsoft.com/office/drawing/2014/main" id="{90268E13-7511-41EA-8F02-92FA3FEBC95A}"/>
               </a:ext>
             </a:extLst>
           </p:cNvPr>
@@ -4439,7 +4439,7 @@
           <p:cNvPr id="3" name="">
             <a:extLst xmlns:a="http://schemas.openxmlformats.org/drawingml/2006/main">
               <a:ext uri="{FF2B5EF4-FFF2-40B4-BE49-F238E27FC236}">
-                <a16:creationId xmlns:a16="http://schemas.microsoft.com/office/drawing/2014/main" id="{C011FC88-B9C5-444E-81BA-95FB38F7D4AF}"/>
+                <a16:creationId xmlns:a16="http://schemas.microsoft.com/office/drawing/2014/main" id="{A1C43BDE-56E3-4925-BA83-19F29FB0426B}"/>
               </a:ext>
             </a:extLst>
           </p:cNvPr>
@@ -4471,7 +4471,7 @@
           <p:cNvPr id="4" name="">
             <a:extLst xmlns:a="http://schemas.openxmlformats.org/drawingml/2006/main">
               <a:ext uri="{FF2B5EF4-FFF2-40B4-BE49-F238E27FC236}">
-                <a16:creationId xmlns:a16="http://schemas.microsoft.com/office/drawing/2014/main" id="{D717E8A6-D4B0-4F5C-9D76-F2D26AE7635F}"/>
+                <a16:creationId xmlns:a16="http://schemas.microsoft.com/office/drawing/2014/main" id="{5F643830-C216-4D93-B6CD-8D13BB96F7E6}"/>
               </a:ext>
             </a:extLst>
           </p:cNvPr>
@@ -4528,7 +4528,7 @@
           <p:cNvPr id="5" name="">
             <a:extLst xmlns:a="http://schemas.openxmlformats.org/drawingml/2006/main">
               <a:ext uri="{FF2B5EF4-FFF2-40B4-BE49-F238E27FC236}">
-                <a16:creationId xmlns:a16="http://schemas.microsoft.com/office/drawing/2014/main" id="{6E1593F4-2CA3-4AB0-9644-78755EF9A8BC}"/>
+                <a16:creationId xmlns:a16="http://schemas.microsoft.com/office/drawing/2014/main" id="{284B5186-1467-41BD-8A92-E3F8AA81C46E}"/>
               </a:ext>
             </a:extLst>
           </p:cNvPr>
@@ -4585,7 +4585,7 @@
           <p:cNvPr id="6" name="">
             <a:extLst xmlns:a="http://schemas.openxmlformats.org/drawingml/2006/main">
               <a:ext uri="{FF2B5EF4-FFF2-40B4-BE49-F238E27FC236}">
-                <a16:creationId xmlns:a16="http://schemas.microsoft.com/office/drawing/2014/main" id="{66997C7F-7E3B-4735-8CA5-A7B168C0B253}"/>
+                <a16:creationId xmlns:a16="http://schemas.microsoft.com/office/drawing/2014/main" id="{21C5A993-B0D0-405E-A299-89AEA4088527}"/>
               </a:ext>
             </a:extLst>
           </p:cNvPr>
@@ -4642,7 +4642,7 @@
           <p:cNvPr id="7" name="">
             <a:extLst xmlns:a="http://schemas.openxmlformats.org/drawingml/2006/main">
               <a:ext uri="{FF2B5EF4-FFF2-40B4-BE49-F238E27FC236}">
-                <a16:creationId xmlns:a16="http://schemas.microsoft.com/office/drawing/2014/main" id="{B12AC544-0174-4E29-8333-2B0A8F7BF21B}"/>
+                <a16:creationId xmlns:a16="http://schemas.microsoft.com/office/drawing/2014/main" id="{0A058CBC-4E4F-4361-8A25-75A060853505}"/>
               </a:ext>
             </a:extLst>
           </p:cNvPr>
@@ -4674,7 +4674,7 @@
           <p:cNvPr id="8" name="">
             <a:extLst xmlns:a="http://schemas.openxmlformats.org/drawingml/2006/main">
               <a:ext uri="{FF2B5EF4-FFF2-40B4-BE49-F238E27FC236}">
-                <a16:creationId xmlns:a16="http://schemas.microsoft.com/office/drawing/2014/main" id="{C6F53E7E-E0A6-4265-8D9C-9C1EAED728A4}"/>
+                <a16:creationId xmlns:a16="http://schemas.microsoft.com/office/drawing/2014/main" id="{EAA91707-2799-49E8-BEE9-C8BB28E2F9C7}"/>
               </a:ext>
             </a:extLst>
           </p:cNvPr>
@@ -4731,7 +4731,7 @@
           <p:cNvPr id="9" name="">
             <a:extLst xmlns:a="http://schemas.openxmlformats.org/drawingml/2006/main">
               <a:ext uri="{FF2B5EF4-FFF2-40B4-BE49-F238E27FC236}">
-                <a16:creationId xmlns:a16="http://schemas.microsoft.com/office/drawing/2014/main" id="{D190EF85-87C3-48D1-9C4C-717018172F1A}"/>
+                <a16:creationId xmlns:a16="http://schemas.microsoft.com/office/drawing/2014/main" id="{8D88B120-00B9-49E1-9D9E-BDC6FA1D7D6A}"/>
               </a:ext>
             </a:extLst>
           </p:cNvPr>
@@ -4788,7 +4788,7 @@
           <p:cNvPr id="10" name="">
             <a:extLst xmlns:a="http://schemas.openxmlformats.org/drawingml/2006/main">
               <a:ext uri="{FF2B5EF4-FFF2-40B4-BE49-F238E27FC236}">
-                <a16:creationId xmlns:a16="http://schemas.microsoft.com/office/drawing/2014/main" id="{D1F73679-0F6A-4B3D-B92E-059D4D1A2149}"/>
+                <a16:creationId xmlns:a16="http://schemas.microsoft.com/office/drawing/2014/main" id="{553FCF8D-0045-44D2-BDF5-A922F53A6240}"/>
               </a:ext>
             </a:extLst>
           </p:cNvPr>
@@ -4822,7 +4822,7 @@
           <p:cNvPr id="11" name="">
             <a:extLst xmlns:a="http://schemas.openxmlformats.org/drawingml/2006/main">
               <a:ext uri="{FF2B5EF4-FFF2-40B4-BE49-F238E27FC236}">
-                <a16:creationId xmlns:a16="http://schemas.microsoft.com/office/drawing/2014/main" id="{1D45813E-13D5-4E1D-BD10-0DC621BF711D}"/>
+                <a16:creationId xmlns:a16="http://schemas.microsoft.com/office/drawing/2014/main" id="{DDFCF182-112A-4691-92C4-99F6D08D637F}"/>
               </a:ext>
             </a:extLst>
           </p:cNvPr>
@@ -4854,7 +4854,7 @@
           <p:cNvPr id="12" name="">
             <a:extLst xmlns:a="http://schemas.openxmlformats.org/drawingml/2006/main">
               <a:ext uri="{FF2B5EF4-FFF2-40B4-BE49-F238E27FC236}">
-                <a16:creationId xmlns:a16="http://schemas.microsoft.com/office/drawing/2014/main" id="{42E2CD73-74E7-4E7C-AE33-4169EDDCAED1}"/>
+                <a16:creationId xmlns:a16="http://schemas.microsoft.com/office/drawing/2014/main" id="{D29A9BF7-D80F-482C-9A12-795915038E78}"/>
               </a:ext>
             </a:extLst>
           </p:cNvPr>
@@ -4911,7 +4911,7 @@
           <p:cNvPr id="13" name="">
             <a:extLst xmlns:a="http://schemas.openxmlformats.org/drawingml/2006/main">
               <a:ext uri="{FF2B5EF4-FFF2-40B4-BE49-F238E27FC236}">
-                <a16:creationId xmlns:a16="http://schemas.microsoft.com/office/drawing/2014/main" id="{AF5E55C2-B173-405F-88EB-CE5A966F2D6A}"/>
+                <a16:creationId xmlns:a16="http://schemas.microsoft.com/office/drawing/2014/main" id="{95F7F3EC-E504-476E-B7F8-66705C6549F8}"/>
               </a:ext>
             </a:extLst>
           </p:cNvPr>
@@ -4968,7 +4968,7 @@
           <p:cNvPr id="14" name="">
             <a:extLst xmlns:a="http://schemas.openxmlformats.org/drawingml/2006/main">
               <a:ext uri="{FF2B5EF4-FFF2-40B4-BE49-F238E27FC236}">
-                <a16:creationId xmlns:a16="http://schemas.microsoft.com/office/drawing/2014/main" id="{4A05F937-8ECD-499D-9149-8214E325A441}"/>
+                <a16:creationId xmlns:a16="http://schemas.microsoft.com/office/drawing/2014/main" id="{29C6893A-E986-471A-AD83-424FDD8EB24D}"/>
               </a:ext>
             </a:extLst>
           </p:cNvPr>
@@ -5002,7 +5002,7 @@
           <p:cNvPr id="15" name="">
             <a:extLst xmlns:a="http://schemas.openxmlformats.org/drawingml/2006/main">
               <a:ext uri="{FF2B5EF4-FFF2-40B4-BE49-F238E27FC236}">
-                <a16:creationId xmlns:a16="http://schemas.microsoft.com/office/drawing/2014/main" id="{8939A95E-63EC-4F1B-A43C-963FB3259BE1}"/>
+                <a16:creationId xmlns:a16="http://schemas.microsoft.com/office/drawing/2014/main" id="{648E260D-89E3-4814-89CE-E852578B9EFA}"/>
               </a:ext>
             </a:extLst>
           </p:cNvPr>
@@ -5034,7 +5034,7 @@
           <p:cNvPr id="16" name="">
             <a:extLst xmlns:a="http://schemas.openxmlformats.org/drawingml/2006/main">
               <a:ext uri="{FF2B5EF4-FFF2-40B4-BE49-F238E27FC236}">
-                <a16:creationId xmlns:a16="http://schemas.microsoft.com/office/drawing/2014/main" id="{1943306B-0F58-4231-99B1-03D8A4BCE92C}"/>
+                <a16:creationId xmlns:a16="http://schemas.microsoft.com/office/drawing/2014/main" id="{0B02D254-C7F8-42A7-BEFC-2F343F13CF7E}"/>
               </a:ext>
             </a:extLst>
           </p:cNvPr>
@@ -5091,7 +5091,7 @@
           <p:cNvPr id="17" name="">
             <a:extLst xmlns:a="http://schemas.openxmlformats.org/drawingml/2006/main">
               <a:ext uri="{FF2B5EF4-FFF2-40B4-BE49-F238E27FC236}">
-                <a16:creationId xmlns:a16="http://schemas.microsoft.com/office/drawing/2014/main" id="{518D8E4F-6787-4A79-A87E-032213C9F1B4}"/>
+                <a16:creationId xmlns:a16="http://schemas.microsoft.com/office/drawing/2014/main" id="{AEA7AFF6-4E23-410A-98C1-7A6E5E52D631}"/>
               </a:ext>
             </a:extLst>
           </p:cNvPr>
@@ -5148,7 +5148,7 @@
           <p:cNvPr id="18" name="">
             <a:extLst xmlns:a="http://schemas.openxmlformats.org/drawingml/2006/main">
               <a:ext uri="{FF2B5EF4-FFF2-40B4-BE49-F238E27FC236}">
-                <a16:creationId xmlns:a16="http://schemas.microsoft.com/office/drawing/2014/main" id="{4BC739EA-DC04-4B62-BE62-9AAE1DD78DB1}"/>
+                <a16:creationId xmlns:a16="http://schemas.microsoft.com/office/drawing/2014/main" id="{C8552C12-3FA2-4918-9BC1-57AF58C25C6A}"/>
               </a:ext>
             </a:extLst>
           </p:cNvPr>
@@ -5182,7 +5182,7 @@
           <p:cNvPr id="19" name="">
             <a:extLst xmlns:a="http://schemas.openxmlformats.org/drawingml/2006/main">
               <a:ext uri="{FF2B5EF4-FFF2-40B4-BE49-F238E27FC236}">
-                <a16:creationId xmlns:a16="http://schemas.microsoft.com/office/drawing/2014/main" id="{5C227745-34C6-42A2-97E8-EB57CE05A2B6}"/>
+                <a16:creationId xmlns:a16="http://schemas.microsoft.com/office/drawing/2014/main" id="{2AC324C4-E470-4996-8B75-C177EBD75C99}"/>
               </a:ext>
             </a:extLst>
           </p:cNvPr>
@@ -5214,7 +5214,7 @@
           <p:cNvPr id="20" name="">
             <a:extLst xmlns:a="http://schemas.openxmlformats.org/drawingml/2006/main">
               <a:ext uri="{FF2B5EF4-FFF2-40B4-BE49-F238E27FC236}">
-                <a16:creationId xmlns:a16="http://schemas.microsoft.com/office/drawing/2014/main" id="{F17DB5CC-F61C-4190-9C05-9E9FE402728D}"/>
+                <a16:creationId xmlns:a16="http://schemas.microsoft.com/office/drawing/2014/main" id="{331C082B-7D3D-47D9-92E6-A72F8029D6BB}"/>
               </a:ext>
             </a:extLst>
           </p:cNvPr>
@@ -5271,7 +5271,7 @@
           <p:cNvPr id="21" name="">
             <a:extLst xmlns:a="http://schemas.openxmlformats.org/drawingml/2006/main">
               <a:ext uri="{FF2B5EF4-FFF2-40B4-BE49-F238E27FC236}">
-                <a16:creationId xmlns:a16="http://schemas.microsoft.com/office/drawing/2014/main" id="{A9BFF8A0-BE57-49F3-9E8E-5E37C90499B4}"/>
+                <a16:creationId xmlns:a16="http://schemas.microsoft.com/office/drawing/2014/main" id="{15007EDD-1CD6-4350-843B-5FBDB7F45977}"/>
               </a:ext>
             </a:extLst>
           </p:cNvPr>
@@ -5328,7 +5328,7 @@
           <p:cNvPr id="22" name="">
             <a:extLst xmlns:a="http://schemas.openxmlformats.org/drawingml/2006/main">
               <a:ext uri="{FF2B5EF4-FFF2-40B4-BE49-F238E27FC236}">
-                <a16:creationId xmlns:a16="http://schemas.microsoft.com/office/drawing/2014/main" id="{482ADCBD-13D1-450B-AA89-68CACCD64EA8}"/>
+                <a16:creationId xmlns:a16="http://schemas.microsoft.com/office/drawing/2014/main" id="{F045A13A-A2C1-4454-8506-BA72088AD924}"/>
               </a:ext>
             </a:extLst>
           </p:cNvPr>
@@ -5383,7 +5383,7 @@
     </p:spTree>
     <p:extLst>
       <p:ext uri="{BB962C8B-B14F-4D97-AF65-F5344CB8AC3E}">
-        <p14:creationId xmlns:p14="http://schemas.microsoft.com/office/powerpoint/2010/main" val="458999360"/>
+        <p14:creationId xmlns:p14="http://schemas.microsoft.com/office/powerpoint/2010/main" val="114742572"/>
       </p:ext>
     </p:extLst>
   </p:cSld>
@@ -5584,7 +5584,7 @@
           <p:cNvPr id="23" name="">
             <a:extLst xmlns:a="http://schemas.openxmlformats.org/drawingml/2006/main">
               <a:ext uri="{FF2B5EF4-FFF2-40B4-BE49-F238E27FC236}">
-                <a16:creationId xmlns:a16="http://schemas.microsoft.com/office/drawing/2014/main" id="{409B18B7-E542-49EC-B9AA-470CEFE6CFF8}"/>
+                <a16:creationId xmlns:a16="http://schemas.microsoft.com/office/drawing/2014/main" id="{959EABBB-9DFC-4D22-A477-3BB7DD579C59}"/>
               </a:ext>
             </a:extLst>
           </p:cNvPr>
@@ -5616,7 +5616,7 @@
           <p:cNvPr id="2" name="">
             <a:extLst xmlns:a="http://schemas.openxmlformats.org/drawingml/2006/main">
               <a:ext uri="{FF2B5EF4-FFF2-40B4-BE49-F238E27FC236}">
-                <a16:creationId xmlns:a16="http://schemas.microsoft.com/office/drawing/2014/main" id="{A8A2A522-A1D3-47ED-B1C8-E7877E854976}"/>
+                <a16:creationId xmlns:a16="http://schemas.microsoft.com/office/drawing/2014/main" id="{990CFD27-39B4-4102-A774-A1249B3980D9}"/>
               </a:ext>
             </a:extLst>
           </p:cNvPr>
@@ -5673,7 +5673,7 @@
           <p:cNvPr id="3" name="">
             <a:extLst xmlns:a="http://schemas.openxmlformats.org/drawingml/2006/main">
               <a:ext uri="{FF2B5EF4-FFF2-40B4-BE49-F238E27FC236}">
-                <a16:creationId xmlns:a16="http://schemas.microsoft.com/office/drawing/2014/main" id="{70CDFCD8-D75A-42EB-BEB7-42423C278F49}"/>
+                <a16:creationId xmlns:a16="http://schemas.microsoft.com/office/drawing/2014/main" id="{33A8FD0A-6818-4365-9A57-48F48E48A1F1}"/>
               </a:ext>
             </a:extLst>
           </p:cNvPr>
@@ -5705,7 +5705,7 @@
           <p:cNvPr id="4" name="">
             <a:extLst xmlns:a="http://schemas.openxmlformats.org/drawingml/2006/main">
               <a:ext uri="{FF2B5EF4-FFF2-40B4-BE49-F238E27FC236}">
-                <a16:creationId xmlns:a16="http://schemas.microsoft.com/office/drawing/2014/main" id="{E92EFC9F-9F7D-4015-8439-3CDDD7098183}"/>
+                <a16:creationId xmlns:a16="http://schemas.microsoft.com/office/drawing/2014/main" id="{74606D95-0992-4767-9E3C-542DBA190546}"/>
               </a:ext>
             </a:extLst>
           </p:cNvPr>
@@ -5762,7 +5762,7 @@
           <p:cNvPr id="5" name="">
             <a:extLst xmlns:a="http://schemas.openxmlformats.org/drawingml/2006/main">
               <a:ext uri="{FF2B5EF4-FFF2-40B4-BE49-F238E27FC236}">
-                <a16:creationId xmlns:a16="http://schemas.microsoft.com/office/drawing/2014/main" id="{5ADDBC8B-03F9-4346-8530-80765A915F82}"/>
+                <a16:creationId xmlns:a16="http://schemas.microsoft.com/office/drawing/2014/main" id="{47924E3F-85EB-4E37-83AC-0EDC2391B86E}"/>
               </a:ext>
             </a:extLst>
           </p:cNvPr>
@@ -5819,7 +5819,7 @@
           <p:cNvPr id="6" name="">
             <a:extLst xmlns:a="http://schemas.openxmlformats.org/drawingml/2006/main">
               <a:ext uri="{FF2B5EF4-FFF2-40B4-BE49-F238E27FC236}">
-                <a16:creationId xmlns:a16="http://schemas.microsoft.com/office/drawing/2014/main" id="{EE9EF63E-3B8B-44E9-9059-BAD1E7D8A826}"/>
+                <a16:creationId xmlns:a16="http://schemas.microsoft.com/office/drawing/2014/main" id="{AA684C3D-B8B7-4435-8985-3CA162914FA5}"/>
               </a:ext>
             </a:extLst>
           </p:cNvPr>
@@ -5876,7 +5876,7 @@
           <p:cNvPr id="7" name="">
             <a:extLst xmlns:a="http://schemas.openxmlformats.org/drawingml/2006/main">
               <a:ext uri="{FF2B5EF4-FFF2-40B4-BE49-F238E27FC236}">
-                <a16:creationId xmlns:a16="http://schemas.microsoft.com/office/drawing/2014/main" id="{70F2FF99-3A5E-49E3-8FD7-9066B489A81F}"/>
+                <a16:creationId xmlns:a16="http://schemas.microsoft.com/office/drawing/2014/main" id="{4FA1E056-1228-41D8-9B9E-36A0F6FF2D9F}"/>
               </a:ext>
             </a:extLst>
           </p:cNvPr>
@@ -5908,7 +5908,7 @@
           <p:cNvPr id="8" name="">
             <a:extLst xmlns:a="http://schemas.openxmlformats.org/drawingml/2006/main">
               <a:ext uri="{FF2B5EF4-FFF2-40B4-BE49-F238E27FC236}">
-                <a16:creationId xmlns:a16="http://schemas.microsoft.com/office/drawing/2014/main" id="{9EAD697C-28D1-4554-AF2F-5802085EC4C4}"/>
+                <a16:creationId xmlns:a16="http://schemas.microsoft.com/office/drawing/2014/main" id="{06E8350D-FCB6-48CB-B77A-FEFE3E65DB0C}"/>
               </a:ext>
             </a:extLst>
           </p:cNvPr>
@@ -5965,7 +5965,7 @@
           <p:cNvPr id="9" name="">
             <a:extLst xmlns:a="http://schemas.openxmlformats.org/drawingml/2006/main">
               <a:ext uri="{FF2B5EF4-FFF2-40B4-BE49-F238E27FC236}">
-                <a16:creationId xmlns:a16="http://schemas.microsoft.com/office/drawing/2014/main" id="{08B9D187-1B38-485C-98D2-EBB2DD2D6ED9}"/>
+                <a16:creationId xmlns:a16="http://schemas.microsoft.com/office/drawing/2014/main" id="{9607208B-E46E-4C64-BE97-24B160720D50}"/>
               </a:ext>
             </a:extLst>
           </p:cNvPr>
@@ -6022,7 +6022,7 @@
           <p:cNvPr id="10" name="">
             <a:extLst xmlns:a="http://schemas.openxmlformats.org/drawingml/2006/main">
               <a:ext uri="{FF2B5EF4-FFF2-40B4-BE49-F238E27FC236}">
-                <a16:creationId xmlns:a16="http://schemas.microsoft.com/office/drawing/2014/main" id="{F0DCF42F-340D-43F3-837E-A231C4D814CF}"/>
+                <a16:creationId xmlns:a16="http://schemas.microsoft.com/office/drawing/2014/main" id="{283A4215-D920-414B-9982-1C6E3B0DA6AB}"/>
               </a:ext>
             </a:extLst>
           </p:cNvPr>
@@ -6056,7 +6056,7 @@
           <p:cNvPr id="11" name="">
             <a:extLst xmlns:a="http://schemas.openxmlformats.org/drawingml/2006/main">
               <a:ext uri="{FF2B5EF4-FFF2-40B4-BE49-F238E27FC236}">
-                <a16:creationId xmlns:a16="http://schemas.microsoft.com/office/drawing/2014/main" id="{7C328F0C-7643-4AD4-B6FB-384CCA36BE60}"/>
+                <a16:creationId xmlns:a16="http://schemas.microsoft.com/office/drawing/2014/main" id="{A0EEEF97-8A37-4F3B-A66B-CC00D3F110B7}"/>
               </a:ext>
             </a:extLst>
           </p:cNvPr>
@@ -6088,7 +6088,7 @@
           <p:cNvPr id="12" name="">
             <a:extLst xmlns:a="http://schemas.openxmlformats.org/drawingml/2006/main">
               <a:ext uri="{FF2B5EF4-FFF2-40B4-BE49-F238E27FC236}">
-                <a16:creationId xmlns:a16="http://schemas.microsoft.com/office/drawing/2014/main" id="{9B1266A4-B75C-4AE1-8C04-DDC5A3E7A15F}"/>
+                <a16:creationId xmlns:a16="http://schemas.microsoft.com/office/drawing/2014/main" id="{59EDA46D-5429-414E-BE4D-22FF0F1D40C4}"/>
               </a:ext>
             </a:extLst>
           </p:cNvPr>
@@ -6145,7 +6145,7 @@
           <p:cNvPr id="13" name="">
             <a:extLst xmlns:a="http://schemas.openxmlformats.org/drawingml/2006/main">
               <a:ext uri="{FF2B5EF4-FFF2-40B4-BE49-F238E27FC236}">
-                <a16:creationId xmlns:a16="http://schemas.microsoft.com/office/drawing/2014/main" id="{ED3C3E85-E69A-4B62-B44B-1BB2C3001BBC}"/>
+                <a16:creationId xmlns:a16="http://schemas.microsoft.com/office/drawing/2014/main" id="{FDE41537-61FB-4B6F-8E74-47F479D67520}"/>
               </a:ext>
             </a:extLst>
           </p:cNvPr>
@@ -6202,7 +6202,7 @@
           <p:cNvPr id="14" name="">
             <a:extLst xmlns:a="http://schemas.openxmlformats.org/drawingml/2006/main">
               <a:ext uri="{FF2B5EF4-FFF2-40B4-BE49-F238E27FC236}">
-                <a16:creationId xmlns:a16="http://schemas.microsoft.com/office/drawing/2014/main" id="{9BA84A10-D2A0-4393-AF15-2F41ADEE8016}"/>
+                <a16:creationId xmlns:a16="http://schemas.microsoft.com/office/drawing/2014/main" id="{6DEEB65A-07D8-4E7D-827B-2DCDD73A9541}"/>
               </a:ext>
             </a:extLst>
           </p:cNvPr>
@@ -6236,7 +6236,7 @@
           <p:cNvPr id="15" name="">
             <a:extLst xmlns:a="http://schemas.openxmlformats.org/drawingml/2006/main">
               <a:ext uri="{FF2B5EF4-FFF2-40B4-BE49-F238E27FC236}">
-                <a16:creationId xmlns:a16="http://schemas.microsoft.com/office/drawing/2014/main" id="{542F6811-4856-4DFC-A0D1-86C9236E482C}"/>
+                <a16:creationId xmlns:a16="http://schemas.microsoft.com/office/drawing/2014/main" id="{AF04B3C3-9842-4C07-9E0F-8140D52504B3}"/>
               </a:ext>
             </a:extLst>
           </p:cNvPr>
@@ -6268,7 +6268,7 @@
           <p:cNvPr id="16" name="">
             <a:extLst xmlns:a="http://schemas.openxmlformats.org/drawingml/2006/main">
               <a:ext uri="{FF2B5EF4-FFF2-40B4-BE49-F238E27FC236}">
-                <a16:creationId xmlns:a16="http://schemas.microsoft.com/office/drawing/2014/main" id="{4BF6F08B-F738-4246-BA36-8E73D8388E24}"/>
+                <a16:creationId xmlns:a16="http://schemas.microsoft.com/office/drawing/2014/main" id="{7B7043F8-5FE6-4E61-8C18-0762F9DA73DE}"/>
               </a:ext>
             </a:extLst>
           </p:cNvPr>
@@ -6325,7 +6325,7 @@
           <p:cNvPr id="17" name="">
             <a:extLst xmlns:a="http://schemas.openxmlformats.org/drawingml/2006/main">
               <a:ext uri="{FF2B5EF4-FFF2-40B4-BE49-F238E27FC236}">
-                <a16:creationId xmlns:a16="http://schemas.microsoft.com/office/drawing/2014/main" id="{D45E9254-1CA8-42A0-AD3C-DAF99043F51E}"/>
+                <a16:creationId xmlns:a16="http://schemas.microsoft.com/office/drawing/2014/main" id="{8D72F5B3-274F-4F89-9FFD-6A616FAFC518}"/>
               </a:ext>
             </a:extLst>
           </p:cNvPr>
@@ -6382,7 +6382,7 @@
           <p:cNvPr id="18" name="">
             <a:extLst xmlns:a="http://schemas.openxmlformats.org/drawingml/2006/main">
               <a:ext uri="{FF2B5EF4-FFF2-40B4-BE49-F238E27FC236}">
-                <a16:creationId xmlns:a16="http://schemas.microsoft.com/office/drawing/2014/main" id="{84670CB0-3636-44D5-9236-F20570EB5B33}"/>
+                <a16:creationId xmlns:a16="http://schemas.microsoft.com/office/drawing/2014/main" id="{0D771C44-9E97-4C14-800A-CF3A7EE3BE15}"/>
               </a:ext>
             </a:extLst>
           </p:cNvPr>
@@ -6416,7 +6416,7 @@
           <p:cNvPr id="19" name="">
             <a:extLst xmlns:a="http://schemas.openxmlformats.org/drawingml/2006/main">
               <a:ext uri="{FF2B5EF4-FFF2-40B4-BE49-F238E27FC236}">
-                <a16:creationId xmlns:a16="http://schemas.microsoft.com/office/drawing/2014/main" id="{8649160D-439A-45DF-B14A-71DD2E1A4C6E}"/>
+                <a16:creationId xmlns:a16="http://schemas.microsoft.com/office/drawing/2014/main" id="{FCF7DDC4-AA3A-4963-BD5B-9EC299E4BCE9}"/>
               </a:ext>
             </a:extLst>
           </p:cNvPr>
@@ -6448,7 +6448,7 @@
           <p:cNvPr id="20" name="">
             <a:extLst xmlns:a="http://schemas.openxmlformats.org/drawingml/2006/main">
               <a:ext uri="{FF2B5EF4-FFF2-40B4-BE49-F238E27FC236}">
-                <a16:creationId xmlns:a16="http://schemas.microsoft.com/office/drawing/2014/main" id="{52424970-0080-4964-B23D-4411806E40A2}"/>
+                <a16:creationId xmlns:a16="http://schemas.microsoft.com/office/drawing/2014/main" id="{1339CF98-B7B3-43ED-99A7-6CD27A3C435D}"/>
               </a:ext>
             </a:extLst>
           </p:cNvPr>
@@ -6505,7 +6505,7 @@
           <p:cNvPr id="21" name="">
             <a:extLst xmlns:a="http://schemas.openxmlformats.org/drawingml/2006/main">
               <a:ext uri="{FF2B5EF4-FFF2-40B4-BE49-F238E27FC236}">
-                <a16:creationId xmlns:a16="http://schemas.microsoft.com/office/drawing/2014/main" id="{A7F0EA47-5276-4D87-85B5-908CCD9EAE95}"/>
+                <a16:creationId xmlns:a16="http://schemas.microsoft.com/office/drawing/2014/main" id="{BA32A98A-602E-493C-9B68-AFBD449232B9}"/>
               </a:ext>
             </a:extLst>
           </p:cNvPr>
@@ -6562,7 +6562,7 @@
           <p:cNvPr id="22" name="">
             <a:extLst xmlns:a="http://schemas.openxmlformats.org/drawingml/2006/main">
               <a:ext uri="{FF2B5EF4-FFF2-40B4-BE49-F238E27FC236}">
-                <a16:creationId xmlns:a16="http://schemas.microsoft.com/office/drawing/2014/main" id="{AF39FCD6-9EE5-4E87-AC00-F6061CFE0F11}"/>
+                <a16:creationId xmlns:a16="http://schemas.microsoft.com/office/drawing/2014/main" id="{915520FF-49F5-4870-AD0C-372970B21A93}"/>
               </a:ext>
             </a:extLst>
           </p:cNvPr>
@@ -6617,7 +6617,7 @@
     </p:spTree>
     <p:extLst>
       <p:ext uri="{BB962C8B-B14F-4D97-AF65-F5344CB8AC3E}">
-        <p14:creationId xmlns:p14="http://schemas.microsoft.com/office/powerpoint/2010/main" val="1409731373"/>
+        <p14:creationId xmlns:p14="http://schemas.microsoft.com/office/powerpoint/2010/main" val="431488841"/>
       </p:ext>
     </p:extLst>
   </p:cSld>
@@ -6818,7 +6818,7 @@
           <p:cNvPr id="16" name="">
             <a:extLst xmlns:a="http://schemas.openxmlformats.org/drawingml/2006/main">
               <a:ext uri="{FF2B5EF4-FFF2-40B4-BE49-F238E27FC236}">
-                <a16:creationId xmlns:a16="http://schemas.microsoft.com/office/drawing/2014/main" id="{0460520B-2688-4EAD-8C7D-F626D706386B}"/>
+                <a16:creationId xmlns:a16="http://schemas.microsoft.com/office/drawing/2014/main" id="{3435C7B3-C89E-4E5D-ABD7-C80816A29CAF}"/>
               </a:ext>
             </a:extLst>
           </p:cNvPr>
@@ -6850,7 +6850,7 @@
           <p:cNvPr id="2" name="">
             <a:extLst xmlns:a="http://schemas.openxmlformats.org/drawingml/2006/main">
               <a:ext uri="{FF2B5EF4-FFF2-40B4-BE49-F238E27FC236}">
-                <a16:creationId xmlns:a16="http://schemas.microsoft.com/office/drawing/2014/main" id="{E9E25935-B72A-4C58-9E61-126836A15A9C}"/>
+                <a16:creationId xmlns:a16="http://schemas.microsoft.com/office/drawing/2014/main" id="{1B607CB9-DFF9-4724-BC3E-513087F1746D}"/>
               </a:ext>
             </a:extLst>
           </p:cNvPr>
@@ -6907,7 +6907,7 @@
           <p:cNvPr id="3" name="">
             <a:extLst xmlns:a="http://schemas.openxmlformats.org/drawingml/2006/main">
               <a:ext uri="{FF2B5EF4-FFF2-40B4-BE49-F238E27FC236}">
-                <a16:creationId xmlns:a16="http://schemas.microsoft.com/office/drawing/2014/main" id="{174423C8-74EF-4243-9D48-15E39412CACA}"/>
+                <a16:creationId xmlns:a16="http://schemas.microsoft.com/office/drawing/2014/main" id="{DA501D33-EA90-429B-980D-CBB2AAD18F1F}"/>
               </a:ext>
             </a:extLst>
           </p:cNvPr>
@@ -6939,7 +6939,7 @@
           <p:cNvPr id="4" name="">
             <a:extLst xmlns:a="http://schemas.openxmlformats.org/drawingml/2006/main">
               <a:ext uri="{FF2B5EF4-FFF2-40B4-BE49-F238E27FC236}">
-                <a16:creationId xmlns:a16="http://schemas.microsoft.com/office/drawing/2014/main" id="{75CA4AD2-29BD-4D8E-BF0F-EE0ABB7C7159}"/>
+                <a16:creationId xmlns:a16="http://schemas.microsoft.com/office/drawing/2014/main" id="{7287C280-C4A6-4796-90FC-0EC32F09A07B}"/>
               </a:ext>
             </a:extLst>
           </p:cNvPr>
@@ -6996,7 +6996,7 @@
           <p:cNvPr id="5" name="">
             <a:extLst xmlns:a="http://schemas.openxmlformats.org/drawingml/2006/main">
               <a:ext uri="{FF2B5EF4-FFF2-40B4-BE49-F238E27FC236}">
-                <a16:creationId xmlns:a16="http://schemas.microsoft.com/office/drawing/2014/main" id="{396FA7CC-279C-49EA-90C8-F47D023EF1FB}"/>
+                <a16:creationId xmlns:a16="http://schemas.microsoft.com/office/drawing/2014/main" id="{FB47CDD5-841C-4B1D-B22A-9CD6AB7EA0BA}"/>
               </a:ext>
             </a:extLst>
           </p:cNvPr>
@@ -7053,7 +7053,7 @@
           <p:cNvPr id="6" name="">
             <a:extLst xmlns:a="http://schemas.openxmlformats.org/drawingml/2006/main">
               <a:ext uri="{FF2B5EF4-FFF2-40B4-BE49-F238E27FC236}">
-                <a16:creationId xmlns:a16="http://schemas.microsoft.com/office/drawing/2014/main" id="{16244A18-2C61-420A-8873-EAE59F8D3ED8}"/>
+                <a16:creationId xmlns:a16="http://schemas.microsoft.com/office/drawing/2014/main" id="{C35C428A-BA01-486F-82B2-EF67D72B2A0C}"/>
               </a:ext>
             </a:extLst>
           </p:cNvPr>
@@ -7110,7 +7110,7 @@
           <p:cNvPr id="7" name="">
             <a:extLst xmlns:a="http://schemas.openxmlformats.org/drawingml/2006/main">
               <a:ext uri="{FF2B5EF4-FFF2-40B4-BE49-F238E27FC236}">
-                <a16:creationId xmlns:a16="http://schemas.microsoft.com/office/drawing/2014/main" id="{696B2E1A-2995-4874-AD89-A42A9CBD2F9A}"/>
+                <a16:creationId xmlns:a16="http://schemas.microsoft.com/office/drawing/2014/main" id="{D4489DE3-D406-414D-91AF-BB30968A7A25}"/>
               </a:ext>
             </a:extLst>
           </p:cNvPr>
@@ -7142,7 +7142,7 @@
           <p:cNvPr id="8" name="">
             <a:extLst xmlns:a="http://schemas.openxmlformats.org/drawingml/2006/main">
               <a:ext uri="{FF2B5EF4-FFF2-40B4-BE49-F238E27FC236}">
-                <a16:creationId xmlns:a16="http://schemas.microsoft.com/office/drawing/2014/main" id="{54E404DA-59F2-4256-BDAE-4983D52D58BA}"/>
+                <a16:creationId xmlns:a16="http://schemas.microsoft.com/office/drawing/2014/main" id="{AF9C4629-9722-4DA8-84D0-4BEC56171989}"/>
               </a:ext>
             </a:extLst>
           </p:cNvPr>
@@ -7199,7 +7199,7 @@
           <p:cNvPr id="9" name="">
             <a:extLst xmlns:a="http://schemas.openxmlformats.org/drawingml/2006/main">
               <a:ext uri="{FF2B5EF4-FFF2-40B4-BE49-F238E27FC236}">
-                <a16:creationId xmlns:a16="http://schemas.microsoft.com/office/drawing/2014/main" id="{5EA23A06-CABB-46CF-AE0F-F81BF528A333}"/>
+                <a16:creationId xmlns:a16="http://schemas.microsoft.com/office/drawing/2014/main" id="{28C54014-EF11-4434-86D5-8898D50ED426}"/>
               </a:ext>
             </a:extLst>
           </p:cNvPr>
@@ -7256,7 +7256,7 @@
           <p:cNvPr id="10" name="">
             <a:extLst xmlns:a="http://schemas.openxmlformats.org/drawingml/2006/main">
               <a:ext uri="{FF2B5EF4-FFF2-40B4-BE49-F238E27FC236}">
-                <a16:creationId xmlns:a16="http://schemas.microsoft.com/office/drawing/2014/main" id="{CE5F28CA-2C40-452F-B01F-7DCA35F891DE}"/>
+                <a16:creationId xmlns:a16="http://schemas.microsoft.com/office/drawing/2014/main" id="{8E865036-3D60-45D0-8E66-E0AAE35F92C7}"/>
               </a:ext>
             </a:extLst>
           </p:cNvPr>
@@ -7313,7 +7313,7 @@
           <p:cNvPr id="11" name="">
             <a:extLst xmlns:a="http://schemas.openxmlformats.org/drawingml/2006/main">
               <a:ext uri="{FF2B5EF4-FFF2-40B4-BE49-F238E27FC236}">
-                <a16:creationId xmlns:a16="http://schemas.microsoft.com/office/drawing/2014/main" id="{0B9EB692-FF0F-4399-9F21-304B1A14A3DD}"/>
+                <a16:creationId xmlns:a16="http://schemas.microsoft.com/office/drawing/2014/main" id="{4EF47AF0-E723-4606-BD69-DF8C1E0902CD}"/>
               </a:ext>
             </a:extLst>
           </p:cNvPr>
@@ -7345,7 +7345,7 @@
           <p:cNvPr id="12" name="">
             <a:extLst xmlns:a="http://schemas.openxmlformats.org/drawingml/2006/main">
               <a:ext uri="{FF2B5EF4-FFF2-40B4-BE49-F238E27FC236}">
-                <a16:creationId xmlns:a16="http://schemas.microsoft.com/office/drawing/2014/main" id="{1780DEF8-3AC9-45DD-B4B9-B5CB74A72676}"/>
+                <a16:creationId xmlns:a16="http://schemas.microsoft.com/office/drawing/2014/main" id="{AAFF7622-65A0-4A57-B2DE-81753681E9A6}"/>
               </a:ext>
             </a:extLst>
           </p:cNvPr>
@@ -7402,7 +7402,7 @@
           <p:cNvPr id="13" name="">
             <a:extLst xmlns:a="http://schemas.openxmlformats.org/drawingml/2006/main">
               <a:ext uri="{FF2B5EF4-FFF2-40B4-BE49-F238E27FC236}">
-                <a16:creationId xmlns:a16="http://schemas.microsoft.com/office/drawing/2014/main" id="{6D25C7C6-C92D-4EC7-A0C7-65126284C5C8}"/>
+                <a16:creationId xmlns:a16="http://schemas.microsoft.com/office/drawing/2014/main" id="{80C443C2-6C62-4CA8-BE56-865A2753B06A}"/>
               </a:ext>
             </a:extLst>
           </p:cNvPr>
@@ -7459,7 +7459,7 @@
           <p:cNvPr id="14" name="">
             <a:extLst xmlns:a="http://schemas.openxmlformats.org/drawingml/2006/main">
               <a:ext uri="{FF2B5EF4-FFF2-40B4-BE49-F238E27FC236}">
-                <a16:creationId xmlns:a16="http://schemas.microsoft.com/office/drawing/2014/main" id="{F2A1C118-E00B-471B-A00E-E6A3E4B75B21}"/>
+                <a16:creationId xmlns:a16="http://schemas.microsoft.com/office/drawing/2014/main" id="{CD4DC929-D4E0-4513-BD6D-C536AA49BF27}"/>
               </a:ext>
             </a:extLst>
           </p:cNvPr>
@@ -7516,7 +7516,7 @@
           <p:cNvPr id="15" name="">
             <a:extLst xmlns:a="http://schemas.openxmlformats.org/drawingml/2006/main">
               <a:ext uri="{FF2B5EF4-FFF2-40B4-BE49-F238E27FC236}">
-                <a16:creationId xmlns:a16="http://schemas.microsoft.com/office/drawing/2014/main" id="{78C3119F-81B3-437E-8880-C9B70B7E5F16}"/>
+                <a16:creationId xmlns:a16="http://schemas.microsoft.com/office/drawing/2014/main" id="{704AF24C-3B4F-4A75-9C04-37E57B629B28}"/>
               </a:ext>
             </a:extLst>
           </p:cNvPr>
@@ -7571,7 +7571,7 @@
     </p:spTree>
     <p:extLst>
       <p:ext uri="{BB962C8B-B14F-4D97-AF65-F5344CB8AC3E}">
-        <p14:creationId xmlns:p14="http://schemas.microsoft.com/office/powerpoint/2010/main" val="344316545"/>
+        <p14:creationId xmlns:p14="http://schemas.microsoft.com/office/powerpoint/2010/main" val="1617016352"/>
       </p:ext>
     </p:extLst>
   </p:cSld>
@@ -7769,10 +7769,10 @@
       </p:grpSpPr>
       <p:sp>
         <p:nvSpPr>
-          <p:cNvPr id="23" name="">
-            <a:extLst xmlns:a="http://schemas.openxmlformats.org/drawingml/2006/main">
-              <a:ext uri="{FF2B5EF4-FFF2-40B4-BE49-F238E27FC236}">
-                <a16:creationId xmlns:a16="http://schemas.microsoft.com/office/drawing/2014/main" id="{CF4B13F5-4AB1-4C77-8AA3-FD9AAD57CF1D}"/>
+          <p:cNvPr id="26" name="">
+            <a:extLst xmlns:a="http://schemas.openxmlformats.org/drawingml/2006/main">
+              <a:ext uri="{FF2B5EF4-FFF2-40B4-BE49-F238E27FC236}">
+                <a16:creationId xmlns:a16="http://schemas.microsoft.com/office/drawing/2014/main" id="{053CE077-7CD1-48F7-AF0B-7DE765937EDD}"/>
               </a:ext>
             </a:extLst>
           </p:cNvPr>
@@ -7804,7 +7804,7 @@
           <p:cNvPr id="2" name="">
             <a:extLst xmlns:a="http://schemas.openxmlformats.org/drawingml/2006/main">
               <a:ext uri="{FF2B5EF4-FFF2-40B4-BE49-F238E27FC236}">
-                <a16:creationId xmlns:a16="http://schemas.microsoft.com/office/drawing/2014/main" id="{A2877C9F-39F3-4AF6-A082-B2758916ECF6}"/>
+                <a16:creationId xmlns:a16="http://schemas.microsoft.com/office/drawing/2014/main" id="{57FEAEDC-FF52-48B3-BD9E-86957972C9B2}"/>
               </a:ext>
             </a:extLst>
           </p:cNvPr>
@@ -7861,7 +7861,7 @@
           <p:cNvPr id="3" name="">
             <a:extLst xmlns:a="http://schemas.openxmlformats.org/drawingml/2006/main">
               <a:ext uri="{FF2B5EF4-FFF2-40B4-BE49-F238E27FC236}">
-                <a16:creationId xmlns:a16="http://schemas.microsoft.com/office/drawing/2014/main" id="{E941AE23-CEE1-40C0-B8F4-89BC5F4BB075}"/>
+                <a16:creationId xmlns:a16="http://schemas.microsoft.com/office/drawing/2014/main" id="{A2335CC9-291B-4790-9F22-0D89B9051ACD}"/>
               </a:ext>
             </a:extLst>
           </p:cNvPr>
@@ -7893,7 +7893,7 @@
           <p:cNvPr id="4" name="">
             <a:extLst xmlns:a="http://schemas.openxmlformats.org/drawingml/2006/main">
               <a:ext uri="{FF2B5EF4-FFF2-40B4-BE49-F238E27FC236}">
-                <a16:creationId xmlns:a16="http://schemas.microsoft.com/office/drawing/2014/main" id="{313A63B6-1A7F-430B-85E7-BEED3375D626}"/>
+                <a16:creationId xmlns:a16="http://schemas.microsoft.com/office/drawing/2014/main" id="{4017D99E-94BA-4318-A161-6EA0D5E73F66}"/>
               </a:ext>
             </a:extLst>
           </p:cNvPr>
@@ -7950,7 +7950,7 @@
           <p:cNvPr id="5" name="">
             <a:extLst xmlns:a="http://schemas.openxmlformats.org/drawingml/2006/main">
               <a:ext uri="{FF2B5EF4-FFF2-40B4-BE49-F238E27FC236}">
-                <a16:creationId xmlns:a16="http://schemas.microsoft.com/office/drawing/2014/main" id="{2FDA6721-8295-4CC1-B848-E739B60F1292}"/>
+                <a16:creationId xmlns:a16="http://schemas.microsoft.com/office/drawing/2014/main" id="{6718BFCE-C260-4CCF-B415-8C784EFFA919}"/>
               </a:ext>
             </a:extLst>
           </p:cNvPr>
@@ -8007,7 +8007,7 @@
           <p:cNvPr id="6" name="">
             <a:extLst xmlns:a="http://schemas.openxmlformats.org/drawingml/2006/main">
               <a:ext uri="{FF2B5EF4-FFF2-40B4-BE49-F238E27FC236}">
-                <a16:creationId xmlns:a16="http://schemas.microsoft.com/office/drawing/2014/main" id="{F6D220F9-DC26-4544-80D6-1DF16FAD2812}"/>
+                <a16:creationId xmlns:a16="http://schemas.microsoft.com/office/drawing/2014/main" id="{64F32F70-9124-43E8-B40E-9E0FA16002B5}"/>
               </a:ext>
             </a:extLst>
           </p:cNvPr>
@@ -8064,7 +8064,7 @@
           <p:cNvPr id="7" name="">
             <a:extLst xmlns:a="http://schemas.openxmlformats.org/drawingml/2006/main">
               <a:ext uri="{FF2B5EF4-FFF2-40B4-BE49-F238E27FC236}">
-                <a16:creationId xmlns:a16="http://schemas.microsoft.com/office/drawing/2014/main" id="{09CDD9EC-A013-4230-AB30-3882D5BBE919}"/>
+                <a16:creationId xmlns:a16="http://schemas.microsoft.com/office/drawing/2014/main" id="{7597733C-58F8-41D0-86DF-6060F21C62AF}"/>
               </a:ext>
             </a:extLst>
           </p:cNvPr>
@@ -8096,7 +8096,7 @@
           <p:cNvPr id="8" name="">
             <a:extLst xmlns:a="http://schemas.openxmlformats.org/drawingml/2006/main">
               <a:ext uri="{FF2B5EF4-FFF2-40B4-BE49-F238E27FC236}">
-                <a16:creationId xmlns:a16="http://schemas.microsoft.com/office/drawing/2014/main" id="{24529A6F-F9F5-4F7A-8655-8DE1F6087613}"/>
+                <a16:creationId xmlns:a16="http://schemas.microsoft.com/office/drawing/2014/main" id="{114998FB-83A0-4AEA-9492-B96FBD5C044D}"/>
               </a:ext>
             </a:extLst>
           </p:cNvPr>
@@ -8153,7 +8153,7 @@
           <p:cNvPr id="9" name="">
             <a:extLst xmlns:a="http://schemas.openxmlformats.org/drawingml/2006/main">
               <a:ext uri="{FF2B5EF4-FFF2-40B4-BE49-F238E27FC236}">
-                <a16:creationId xmlns:a16="http://schemas.microsoft.com/office/drawing/2014/main" id="{795D1DEF-A513-4533-B8B6-CCDA23A883F1}"/>
+                <a16:creationId xmlns:a16="http://schemas.microsoft.com/office/drawing/2014/main" id="{EB4DD01B-CC41-400D-8E3C-D60E3B9D06E4}"/>
               </a:ext>
             </a:extLst>
           </p:cNvPr>
@@ -8210,19 +8210,19 @@
           <p:cNvPr id="10" name="">
             <a:extLst xmlns:a="http://schemas.openxmlformats.org/drawingml/2006/main">
               <a:ext uri="{FF2B5EF4-FFF2-40B4-BE49-F238E27FC236}">
-                <a16:creationId xmlns:a16="http://schemas.microsoft.com/office/drawing/2014/main" id="{C214F14E-C510-4C05-A9AE-7058F84A8CE0}"/>
-              </a:ext>
-            </a:extLst>
-          </p:cNvPr>
-          <p:cNvSpPr>
-            <a:spLocks xmlns:a="http://schemas.openxmlformats.org/drawingml/2006/main" noGrp="1"/>
-          </p:cNvSpPr>
-          <p:nvPr/>
-        </p:nvSpPr>
-        <p:spPr>
-          <a:xfrm xmlns:a="http://schemas.openxmlformats.org/drawingml/2006/main">
-            <a:off x="914400" y="1257300"/>
-            <a:ext cx="10363200" cy="781050"/>
+                <a16:creationId xmlns:a16="http://schemas.microsoft.com/office/drawing/2014/main" id="{9B2BBB1F-23BD-4A0F-A3ED-6064DC6E2B45}"/>
+              </a:ext>
+            </a:extLst>
+          </p:cNvPr>
+          <p:cNvSpPr>
+            <a:spLocks xmlns:a="http://schemas.openxmlformats.org/drawingml/2006/main" noGrp="1"/>
+          </p:cNvSpPr>
+          <p:nvPr/>
+        </p:nvSpPr>
+        <p:spPr>
+          <a:xfrm xmlns:a="http://schemas.openxmlformats.org/drawingml/2006/main">
+            <a:off x="857250" y="1219200"/>
+            <a:ext cx="10477500" cy="742950"/>
           </a:xfrm>
           <a:prstGeom xmlns:a="http://schemas.openxmlformats.org/drawingml/2006/main" prst="rect">
             <a:avLst/>
@@ -8239,7 +8239,7 @@
           <a:lstStyle xmlns:a="http://schemas.openxmlformats.org/drawingml/2006/main"/>
           <a:p xmlns:a="http://schemas.openxmlformats.org/drawingml/2006/main">
             <a:pPr algn="ctr">
-              <a:defRPr sz="2175" b="1">
+              <a:defRPr sz="2100" b="1">
                 <a:solidFill>
                   <a:srgbClr val="17253A"/>
                 </a:solidFill>
@@ -8249,7 +8249,7 @@
               </a:defRPr>
             </a:pPr>
             <a:r>
-              <a:rPr sz="2175" b="1">
+              <a:rPr sz="2100" b="1">
                 <a:solidFill>
                   <a:srgbClr val="17253A"/>
                 </a:solidFill>
@@ -8267,28 +8267,30 @@
           <p:cNvPr id="11" name="">
             <a:extLst xmlns:a="http://schemas.openxmlformats.org/drawingml/2006/main">
               <a:ext uri="{FF2B5EF4-FFF2-40B4-BE49-F238E27FC236}">
-                <a16:creationId xmlns:a16="http://schemas.microsoft.com/office/drawing/2014/main" id="{7BA0E1D5-7B08-42AF-8F93-136AC257A8F2}"/>
-              </a:ext>
-            </a:extLst>
-          </p:cNvPr>
-          <p:cNvSpPr>
-            <a:spLocks xmlns:a="http://schemas.openxmlformats.org/drawingml/2006/main" noGrp="1"/>
-          </p:cNvSpPr>
-          <p:nvPr/>
-        </p:nvSpPr>
-        <p:spPr>
-          <a:xfrm xmlns:a="http://schemas.openxmlformats.org/drawingml/2006/main">
-            <a:off x="1000125" y="2247900"/>
-            <a:ext cx="476250" cy="476250"/>
-          </a:xfrm>
-          <a:prstGeom xmlns:a="http://schemas.openxmlformats.org/drawingml/2006/main" prst="ellipse">
+                <a16:creationId xmlns:a16="http://schemas.microsoft.com/office/drawing/2014/main" id="{2BE5450B-6337-4305-8709-18E6F9E61D81}"/>
+              </a:ext>
+            </a:extLst>
+          </p:cNvPr>
+          <p:cNvSpPr>
+            <a:spLocks xmlns:a="http://schemas.openxmlformats.org/drawingml/2006/main" noGrp="1"/>
+          </p:cNvSpPr>
+          <p:nvPr/>
+        </p:nvSpPr>
+        <p:spPr>
+          <a:xfrm xmlns:a="http://schemas.openxmlformats.org/drawingml/2006/main">
+            <a:off x="971550" y="2124075"/>
+            <a:ext cx="38100" cy="3524250"/>
+          </a:xfrm>
+          <a:prstGeom xmlns:a="http://schemas.openxmlformats.org/drawingml/2006/main" prst="rect">
             <a:avLst/>
           </a:prstGeom>
           <a:solidFill xmlns:a="http://schemas.openxmlformats.org/drawingml/2006/main">
-            <a:srgbClr val="18324A"/>
+            <a:srgbClr val="2C6E73"/>
           </a:solidFill>
           <a:ln xmlns:a="http://schemas.openxmlformats.org/drawingml/2006/main" w="0">
-            <a:noFill/>
+            <a:solidFill>
+              <a:srgbClr val="2C6E73"/>
+            </a:solidFill>
           </a:ln>
         </p:spPr>
       </p:sp>
@@ -8297,19 +8299,19 @@
           <p:cNvPr id="12" name="">
             <a:extLst xmlns:a="http://schemas.openxmlformats.org/drawingml/2006/main">
               <a:ext uri="{FF2B5EF4-FFF2-40B4-BE49-F238E27FC236}">
-                <a16:creationId xmlns:a16="http://schemas.microsoft.com/office/drawing/2014/main" id="{0306232E-3D2F-4860-B40F-653C7AD5D03A}"/>
-              </a:ext>
-            </a:extLst>
-          </p:cNvPr>
-          <p:cNvSpPr>
-            <a:spLocks xmlns:a="http://schemas.openxmlformats.org/drawingml/2006/main" noGrp="1"/>
-          </p:cNvSpPr>
-          <p:nvPr/>
-        </p:nvSpPr>
-        <p:spPr>
-          <a:xfrm xmlns:a="http://schemas.openxmlformats.org/drawingml/2006/main">
-            <a:off x="1000125" y="2276475"/>
-            <a:ext cx="476250" cy="419100"/>
+                <a16:creationId xmlns:a16="http://schemas.microsoft.com/office/drawing/2014/main" id="{3EADCA58-64C4-46A5-8596-CA74B0A3E657}"/>
+              </a:ext>
+            </a:extLst>
+          </p:cNvPr>
+          <p:cNvSpPr>
+            <a:spLocks xmlns:a="http://schemas.openxmlformats.org/drawingml/2006/main" noGrp="1"/>
+          </p:cNvSpPr>
+          <p:nvPr/>
+        </p:nvSpPr>
+        <p:spPr>
+          <a:xfrm xmlns:a="http://schemas.openxmlformats.org/drawingml/2006/main">
+            <a:off x="1162050" y="2200275"/>
+            <a:ext cx="400050" cy="400050"/>
           </a:xfrm>
           <a:prstGeom xmlns:a="http://schemas.openxmlformats.org/drawingml/2006/main" prst="rect">
             <a:avLst/>
@@ -8326,9 +8328,9 @@
           <a:lstStyle xmlns:a="http://schemas.openxmlformats.org/drawingml/2006/main"/>
           <a:p xmlns:a="http://schemas.openxmlformats.org/drawingml/2006/main">
             <a:pPr algn="ctr">
-              <a:defRPr sz="1350" b="1">
-                <a:solidFill>
-                  <a:srgbClr val="FFFFFF"/>
+              <a:defRPr sz="1125" b="1">
+                <a:solidFill>
+                  <a:srgbClr val="2C6E73"/>
                 </a:solidFill>
                 <a:latin typeface="Arial"/>
                 <a:ea typeface="Arial"/>
@@ -8336,9 +8338,9 @@
               </a:defRPr>
             </a:pPr>
             <a:r>
-              <a:rPr sz="1350" b="1">
-                <a:solidFill>
-                  <a:srgbClr val="FFFFFF"/>
+              <a:rPr sz="1125" b="1">
+                <a:solidFill>
+                  <a:srgbClr val="2C6E73"/>
                 </a:solidFill>
                 <a:latin typeface="Arial"/>
                 <a:ea typeface="Arial"/>
@@ -8354,19 +8356,19 @@
           <p:cNvPr id="13" name="">
             <a:extLst xmlns:a="http://schemas.openxmlformats.org/drawingml/2006/main">
               <a:ext uri="{FF2B5EF4-FFF2-40B4-BE49-F238E27FC236}">
-                <a16:creationId xmlns:a16="http://schemas.microsoft.com/office/drawing/2014/main" id="{81654F6F-46A4-494C-B8F4-BEB0D8D98045}"/>
-              </a:ext>
-            </a:extLst>
-          </p:cNvPr>
-          <p:cNvSpPr>
-            <a:spLocks xmlns:a="http://schemas.openxmlformats.org/drawingml/2006/main" noGrp="1"/>
-          </p:cNvSpPr>
-          <p:nvPr/>
-        </p:nvSpPr>
-        <p:spPr>
-          <a:xfrm xmlns:a="http://schemas.openxmlformats.org/drawingml/2006/main">
-            <a:off x="1714500" y="2181225"/>
-            <a:ext cx="9429750" cy="609600"/>
+                <a16:creationId xmlns:a16="http://schemas.microsoft.com/office/drawing/2014/main" id="{E58EDCAE-770A-4410-B261-3FF916868928}"/>
+              </a:ext>
+            </a:extLst>
+          </p:cNvPr>
+          <p:cNvSpPr>
+            <a:spLocks xmlns:a="http://schemas.openxmlformats.org/drawingml/2006/main" noGrp="1"/>
+          </p:cNvSpPr>
+          <p:nvPr/>
+        </p:nvSpPr>
+        <p:spPr>
+          <a:xfrm xmlns:a="http://schemas.openxmlformats.org/drawingml/2006/main">
+            <a:off x="1714500" y="2114550"/>
+            <a:ext cx="9525000" cy="638175"/>
           </a:xfrm>
           <a:prstGeom xmlns:a="http://schemas.openxmlformats.org/drawingml/2006/main" prst="rect">
             <a:avLst/>
@@ -8383,7 +8385,7 @@
           <a:lstStyle xmlns:a="http://schemas.openxmlformats.org/drawingml/2006/main"/>
           <a:p xmlns:a="http://schemas.openxmlformats.org/drawingml/2006/main">
             <a:pPr algn="l">
-              <a:defRPr sz="1500" b="0">
+              <a:defRPr sz="1575" b="0">
                 <a:solidFill>
                   <a:srgbClr val="17253A"/>
                 </a:solidFill>
@@ -8393,7 +8395,7 @@
               </a:defRPr>
             </a:pPr>
             <a:r>
-              <a:rPr sz="1500" b="0">
+              <a:rPr sz="1575" b="0">
                 <a:solidFill>
                   <a:srgbClr val="17253A"/>
                 </a:solidFill>
@@ -8401,7 +8403,7 @@
                 <a:ea typeface="Arial"/>
                 <a:cs typeface="Arial"/>
               </a:rPr>
-              <a:t>Identify the structure: Identify useful common factors or a common denominator.</a:t>
+              <a:t>5/6 = ?/24</a:t>
             </a:r>
           </a:p>
         </p:txBody>
@@ -8411,28 +8413,30 @@
           <p:cNvPr id="14" name="">
             <a:extLst xmlns:a="http://schemas.openxmlformats.org/drawingml/2006/main">
               <a:ext uri="{FF2B5EF4-FFF2-40B4-BE49-F238E27FC236}">
-                <a16:creationId xmlns:a16="http://schemas.microsoft.com/office/drawing/2014/main" id="{3235094B-F047-47EB-A543-F6869538512D}"/>
-              </a:ext>
-            </a:extLst>
-          </p:cNvPr>
-          <p:cNvSpPr>
-            <a:spLocks xmlns:a="http://schemas.openxmlformats.org/drawingml/2006/main" noGrp="1"/>
-          </p:cNvSpPr>
-          <p:nvPr/>
-        </p:nvSpPr>
-        <p:spPr>
-          <a:xfrm xmlns:a="http://schemas.openxmlformats.org/drawingml/2006/main">
-            <a:off x="1000125" y="2990850"/>
-            <a:ext cx="476250" cy="476250"/>
-          </a:xfrm>
-          <a:prstGeom xmlns:a="http://schemas.openxmlformats.org/drawingml/2006/main" prst="ellipse">
+                <a16:creationId xmlns:a16="http://schemas.microsoft.com/office/drawing/2014/main" id="{37D83111-0B16-47D8-99FB-9D4E8AF68A5C}"/>
+              </a:ext>
+            </a:extLst>
+          </p:cNvPr>
+          <p:cNvSpPr>
+            <a:spLocks xmlns:a="http://schemas.openxmlformats.org/drawingml/2006/main" noGrp="1"/>
+          </p:cNvSpPr>
+          <p:nvPr/>
+        </p:nvSpPr>
+        <p:spPr>
+          <a:xfrm xmlns:a="http://schemas.openxmlformats.org/drawingml/2006/main">
+            <a:off x="1714500" y="2771775"/>
+            <a:ext cx="9334500" cy="9525"/>
+          </a:xfrm>
+          <a:prstGeom xmlns:a="http://schemas.openxmlformats.org/drawingml/2006/main" prst="rect">
             <a:avLst/>
           </a:prstGeom>
           <a:solidFill xmlns:a="http://schemas.openxmlformats.org/drawingml/2006/main">
-            <a:srgbClr val="2C6E73"/>
+            <a:srgbClr val="D9E0E6"/>
           </a:solidFill>
           <a:ln xmlns:a="http://schemas.openxmlformats.org/drawingml/2006/main" w="0">
-            <a:noFill/>
+            <a:solidFill>
+              <a:srgbClr val="D9E0E6"/>
+            </a:solidFill>
           </a:ln>
         </p:spPr>
       </p:sp>
@@ -8441,19 +8445,19 @@
           <p:cNvPr id="15" name="">
             <a:extLst xmlns:a="http://schemas.openxmlformats.org/drawingml/2006/main">
               <a:ext uri="{FF2B5EF4-FFF2-40B4-BE49-F238E27FC236}">
-                <a16:creationId xmlns:a16="http://schemas.microsoft.com/office/drawing/2014/main" id="{F4C70870-9FB1-442D-9888-3C0B14F89D2E}"/>
-              </a:ext>
-            </a:extLst>
-          </p:cNvPr>
-          <p:cNvSpPr>
-            <a:spLocks xmlns:a="http://schemas.openxmlformats.org/drawingml/2006/main" noGrp="1"/>
-          </p:cNvSpPr>
-          <p:nvPr/>
-        </p:nvSpPr>
-        <p:spPr>
-          <a:xfrm xmlns:a="http://schemas.openxmlformats.org/drawingml/2006/main">
-            <a:off x="1000125" y="3019425"/>
-            <a:ext cx="476250" cy="419100"/>
+                <a16:creationId xmlns:a16="http://schemas.microsoft.com/office/drawing/2014/main" id="{552EB88F-4664-4BB5-B1D7-0ECFDA7BABE1}"/>
+              </a:ext>
+            </a:extLst>
+          </p:cNvPr>
+          <p:cNvSpPr>
+            <a:spLocks xmlns:a="http://schemas.openxmlformats.org/drawingml/2006/main" noGrp="1"/>
+          </p:cNvSpPr>
+          <p:nvPr/>
+        </p:nvSpPr>
+        <p:spPr>
+          <a:xfrm xmlns:a="http://schemas.openxmlformats.org/drawingml/2006/main">
+            <a:off x="1162050" y="2905125"/>
+            <a:ext cx="400050" cy="400050"/>
           </a:xfrm>
           <a:prstGeom xmlns:a="http://schemas.openxmlformats.org/drawingml/2006/main" prst="rect">
             <a:avLst/>
@@ -8470,9 +8474,9 @@
           <a:lstStyle xmlns:a="http://schemas.openxmlformats.org/drawingml/2006/main"/>
           <a:p xmlns:a="http://schemas.openxmlformats.org/drawingml/2006/main">
             <a:pPr algn="ctr">
-              <a:defRPr sz="1350" b="1">
-                <a:solidFill>
-                  <a:srgbClr val="FFFFFF"/>
+              <a:defRPr sz="1125" b="1">
+                <a:solidFill>
+                  <a:srgbClr val="2C6E73"/>
                 </a:solidFill>
                 <a:latin typeface="Arial"/>
                 <a:ea typeface="Arial"/>
@@ -8480,9 +8484,9 @@
               </a:defRPr>
             </a:pPr>
             <a:r>
-              <a:rPr sz="1350" b="1">
-                <a:solidFill>
-                  <a:srgbClr val="FFFFFF"/>
+              <a:rPr sz="1125" b="1">
+                <a:solidFill>
+                  <a:srgbClr val="2C6E73"/>
                 </a:solidFill>
                 <a:latin typeface="Arial"/>
                 <a:ea typeface="Arial"/>
@@ -8498,19 +8502,19 @@
           <p:cNvPr id="16" name="">
             <a:extLst xmlns:a="http://schemas.openxmlformats.org/drawingml/2006/main">
               <a:ext uri="{FF2B5EF4-FFF2-40B4-BE49-F238E27FC236}">
-                <a16:creationId xmlns:a16="http://schemas.microsoft.com/office/drawing/2014/main" id="{947F14C0-45EB-4E87-96CD-90B8B5C5EB15}"/>
-              </a:ext>
-            </a:extLst>
-          </p:cNvPr>
-          <p:cNvSpPr>
-            <a:spLocks xmlns:a="http://schemas.openxmlformats.org/drawingml/2006/main" noGrp="1"/>
-          </p:cNvSpPr>
-          <p:nvPr/>
-        </p:nvSpPr>
-        <p:spPr>
-          <a:xfrm xmlns:a="http://schemas.openxmlformats.org/drawingml/2006/main">
-            <a:off x="1714500" y="2924175"/>
-            <a:ext cx="9429750" cy="609600"/>
+                <a16:creationId xmlns:a16="http://schemas.microsoft.com/office/drawing/2014/main" id="{3180D423-FF93-48C8-A9D2-CC5BD2CD0CB2}"/>
+              </a:ext>
+            </a:extLst>
+          </p:cNvPr>
+          <p:cNvSpPr>
+            <a:spLocks xmlns:a="http://schemas.openxmlformats.org/drawingml/2006/main" noGrp="1"/>
+          </p:cNvSpPr>
+          <p:nvPr/>
+        </p:nvSpPr>
+        <p:spPr>
+          <a:xfrm xmlns:a="http://schemas.openxmlformats.org/drawingml/2006/main">
+            <a:off x="1714500" y="2819400"/>
+            <a:ext cx="9525000" cy="638175"/>
           </a:xfrm>
           <a:prstGeom xmlns:a="http://schemas.openxmlformats.org/drawingml/2006/main" prst="rect">
             <a:avLst/>
@@ -8527,7 +8531,7 @@
           <a:lstStyle xmlns:a="http://schemas.openxmlformats.org/drawingml/2006/main"/>
           <a:p xmlns:a="http://schemas.openxmlformats.org/drawingml/2006/main">
             <a:pPr algn="l">
-              <a:defRPr sz="1500" b="0">
+              <a:defRPr sz="1575" b="0">
                 <a:solidFill>
                   <a:srgbClr val="17253A"/>
                 </a:solidFill>
@@ -8537,7 +8541,7 @@
               </a:defRPr>
             </a:pPr>
             <a:r>
-              <a:rPr sz="1500" b="0">
+              <a:rPr sz="1575" b="0">
                 <a:solidFill>
                   <a:srgbClr val="17253A"/>
                 </a:solidFill>
@@ -8545,7 +8549,7 @@
                 <a:ea typeface="Arial"/>
                 <a:cs typeface="Arial"/>
               </a:rPr>
-              <a:t>Set up the method: Convert or simplify without changing the fraction's value.</a:t>
+              <a:t>6 × 4 = 24</a:t>
             </a:r>
           </a:p>
         </p:txBody>
@@ -8555,28 +8559,30 @@
           <p:cNvPr id="17" name="">
             <a:extLst xmlns:a="http://schemas.openxmlformats.org/drawingml/2006/main">
               <a:ext uri="{FF2B5EF4-FFF2-40B4-BE49-F238E27FC236}">
-                <a16:creationId xmlns:a16="http://schemas.microsoft.com/office/drawing/2014/main" id="{EC769766-E2BE-4B93-AD7C-7839CFC7AAA4}"/>
-              </a:ext>
-            </a:extLst>
-          </p:cNvPr>
-          <p:cNvSpPr>
-            <a:spLocks xmlns:a="http://schemas.openxmlformats.org/drawingml/2006/main" noGrp="1"/>
-          </p:cNvSpPr>
-          <p:nvPr/>
-        </p:nvSpPr>
-        <p:spPr>
-          <a:xfrm xmlns:a="http://schemas.openxmlformats.org/drawingml/2006/main">
-            <a:off x="1000125" y="3733800"/>
-            <a:ext cx="476250" cy="476250"/>
-          </a:xfrm>
-          <a:prstGeom xmlns:a="http://schemas.openxmlformats.org/drawingml/2006/main" prst="ellipse">
+                <a16:creationId xmlns:a16="http://schemas.microsoft.com/office/drawing/2014/main" id="{6D4762D9-6716-4EDD-80D9-250DA9049C6F}"/>
+              </a:ext>
+            </a:extLst>
+          </p:cNvPr>
+          <p:cNvSpPr>
+            <a:spLocks xmlns:a="http://schemas.openxmlformats.org/drawingml/2006/main" noGrp="1"/>
+          </p:cNvSpPr>
+          <p:nvPr/>
+        </p:nvSpPr>
+        <p:spPr>
+          <a:xfrm xmlns:a="http://schemas.openxmlformats.org/drawingml/2006/main">
+            <a:off x="1714500" y="3476625"/>
+            <a:ext cx="9334500" cy="9525"/>
+          </a:xfrm>
+          <a:prstGeom xmlns:a="http://schemas.openxmlformats.org/drawingml/2006/main" prst="rect">
             <a:avLst/>
           </a:prstGeom>
           <a:solidFill xmlns:a="http://schemas.openxmlformats.org/drawingml/2006/main">
-            <a:srgbClr val="2C6E73"/>
+            <a:srgbClr val="D9E0E6"/>
           </a:solidFill>
           <a:ln xmlns:a="http://schemas.openxmlformats.org/drawingml/2006/main" w="0">
-            <a:noFill/>
+            <a:solidFill>
+              <a:srgbClr val="D9E0E6"/>
+            </a:solidFill>
           </a:ln>
         </p:spPr>
       </p:sp>
@@ -8585,19 +8591,19 @@
           <p:cNvPr id="18" name="">
             <a:extLst xmlns:a="http://schemas.openxmlformats.org/drawingml/2006/main">
               <a:ext uri="{FF2B5EF4-FFF2-40B4-BE49-F238E27FC236}">
-                <a16:creationId xmlns:a16="http://schemas.microsoft.com/office/drawing/2014/main" id="{7C6DBBD0-F5A2-4C31-A182-F655E8B9AF92}"/>
-              </a:ext>
-            </a:extLst>
-          </p:cNvPr>
-          <p:cNvSpPr>
-            <a:spLocks xmlns:a="http://schemas.openxmlformats.org/drawingml/2006/main" noGrp="1"/>
-          </p:cNvSpPr>
-          <p:nvPr/>
-        </p:nvSpPr>
-        <p:spPr>
-          <a:xfrm xmlns:a="http://schemas.openxmlformats.org/drawingml/2006/main">
-            <a:off x="1000125" y="3762375"/>
-            <a:ext cx="476250" cy="419100"/>
+                <a16:creationId xmlns:a16="http://schemas.microsoft.com/office/drawing/2014/main" id="{17BBF28E-6971-487B-B4C8-FEA509BDD000}"/>
+              </a:ext>
+            </a:extLst>
+          </p:cNvPr>
+          <p:cNvSpPr>
+            <a:spLocks xmlns:a="http://schemas.openxmlformats.org/drawingml/2006/main" noGrp="1"/>
+          </p:cNvSpPr>
+          <p:nvPr/>
+        </p:nvSpPr>
+        <p:spPr>
+          <a:xfrm xmlns:a="http://schemas.openxmlformats.org/drawingml/2006/main">
+            <a:off x="1162050" y="3609975"/>
+            <a:ext cx="400050" cy="400050"/>
           </a:xfrm>
           <a:prstGeom xmlns:a="http://schemas.openxmlformats.org/drawingml/2006/main" prst="rect">
             <a:avLst/>
@@ -8614,9 +8620,9 @@
           <a:lstStyle xmlns:a="http://schemas.openxmlformats.org/drawingml/2006/main"/>
           <a:p xmlns:a="http://schemas.openxmlformats.org/drawingml/2006/main">
             <a:pPr algn="ctr">
-              <a:defRPr sz="1350" b="1">
-                <a:solidFill>
-                  <a:srgbClr val="FFFFFF"/>
+              <a:defRPr sz="1125" b="1">
+                <a:solidFill>
+                  <a:srgbClr val="2C6E73"/>
                 </a:solidFill>
                 <a:latin typeface="Arial"/>
                 <a:ea typeface="Arial"/>
@@ -8624,9 +8630,9 @@
               </a:defRPr>
             </a:pPr>
             <a:r>
-              <a:rPr sz="1350" b="1">
-                <a:solidFill>
-                  <a:srgbClr val="FFFFFF"/>
+              <a:rPr sz="1125" b="1">
+                <a:solidFill>
+                  <a:srgbClr val="2C6E73"/>
                 </a:solidFill>
                 <a:latin typeface="Arial"/>
                 <a:ea typeface="Arial"/>
@@ -8642,19 +8648,19 @@
           <p:cNvPr id="19" name="">
             <a:extLst xmlns:a="http://schemas.openxmlformats.org/drawingml/2006/main">
               <a:ext uri="{FF2B5EF4-FFF2-40B4-BE49-F238E27FC236}">
-                <a16:creationId xmlns:a16="http://schemas.microsoft.com/office/drawing/2014/main" id="{3B686D45-641C-4B31-85F6-7C6DF3E52657}"/>
-              </a:ext>
-            </a:extLst>
-          </p:cNvPr>
-          <p:cNvSpPr>
-            <a:spLocks xmlns:a="http://schemas.openxmlformats.org/drawingml/2006/main" noGrp="1"/>
-          </p:cNvSpPr>
-          <p:nvPr/>
-        </p:nvSpPr>
-        <p:spPr>
-          <a:xfrm xmlns:a="http://schemas.openxmlformats.org/drawingml/2006/main">
-            <a:off x="1714500" y="3667125"/>
-            <a:ext cx="9429750" cy="609600"/>
+                <a16:creationId xmlns:a16="http://schemas.microsoft.com/office/drawing/2014/main" id="{F2F0519E-B8FC-465A-AB79-68C5967DB0CB}"/>
+              </a:ext>
+            </a:extLst>
+          </p:cNvPr>
+          <p:cNvSpPr>
+            <a:spLocks xmlns:a="http://schemas.openxmlformats.org/drawingml/2006/main" noGrp="1"/>
+          </p:cNvSpPr>
+          <p:nvPr/>
+        </p:nvSpPr>
+        <p:spPr>
+          <a:xfrm xmlns:a="http://schemas.openxmlformats.org/drawingml/2006/main">
+            <a:off x="1714500" y="3524250"/>
+            <a:ext cx="9525000" cy="638175"/>
           </a:xfrm>
           <a:prstGeom xmlns:a="http://schemas.openxmlformats.org/drawingml/2006/main" prst="rect">
             <a:avLst/>
@@ -8671,7 +8677,7 @@
           <a:lstStyle xmlns:a="http://schemas.openxmlformats.org/drawingml/2006/main"/>
           <a:p xmlns:a="http://schemas.openxmlformats.org/drawingml/2006/main">
             <a:pPr algn="l">
-              <a:defRPr sz="1500" b="0">
+              <a:defRPr sz="1575" b="0">
                 <a:solidFill>
                   <a:srgbClr val="17253A"/>
                 </a:solidFill>
@@ -8681,7 +8687,7 @@
               </a:defRPr>
             </a:pPr>
             <a:r>
-              <a:rPr sz="1500" b="0">
+              <a:rPr sz="1575" b="0">
                 <a:solidFill>
                   <a:srgbClr val="17253A"/>
                 </a:solidFill>
@@ -8689,7 +8695,7 @@
                 <a:ea typeface="Arial"/>
                 <a:cs typeface="Arial"/>
               </a:rPr>
-              <a:t>Complete the calculation: 20/24.</a:t>
+              <a:t>Multiply numerator by the same 4</a:t>
             </a:r>
           </a:p>
         </p:txBody>
@@ -8699,28 +8705,30 @@
           <p:cNvPr id="20" name="">
             <a:extLst xmlns:a="http://schemas.openxmlformats.org/drawingml/2006/main">
               <a:ext uri="{FF2B5EF4-FFF2-40B4-BE49-F238E27FC236}">
-                <a16:creationId xmlns:a16="http://schemas.microsoft.com/office/drawing/2014/main" id="{F4D5EFC9-9BFB-49F1-9ADB-7B3CEA1BB933}"/>
-              </a:ext>
-            </a:extLst>
-          </p:cNvPr>
-          <p:cNvSpPr>
-            <a:spLocks xmlns:a="http://schemas.openxmlformats.org/drawingml/2006/main" noGrp="1"/>
-          </p:cNvSpPr>
-          <p:nvPr/>
-        </p:nvSpPr>
-        <p:spPr>
-          <a:xfrm xmlns:a="http://schemas.openxmlformats.org/drawingml/2006/main">
-            <a:off x="1000125" y="4476750"/>
-            <a:ext cx="476250" cy="476250"/>
-          </a:xfrm>
-          <a:prstGeom xmlns:a="http://schemas.openxmlformats.org/drawingml/2006/main" prst="ellipse">
+                <a16:creationId xmlns:a16="http://schemas.microsoft.com/office/drawing/2014/main" id="{5F3CD476-7860-4985-8E9C-2B2662FAEAD7}"/>
+              </a:ext>
+            </a:extLst>
+          </p:cNvPr>
+          <p:cNvSpPr>
+            <a:spLocks xmlns:a="http://schemas.openxmlformats.org/drawingml/2006/main" noGrp="1"/>
+          </p:cNvSpPr>
+          <p:nvPr/>
+        </p:nvSpPr>
+        <p:spPr>
+          <a:xfrm xmlns:a="http://schemas.openxmlformats.org/drawingml/2006/main">
+            <a:off x="1714500" y="4181475"/>
+            <a:ext cx="9334500" cy="9525"/>
+          </a:xfrm>
+          <a:prstGeom xmlns:a="http://schemas.openxmlformats.org/drawingml/2006/main" prst="rect">
             <a:avLst/>
           </a:prstGeom>
           <a:solidFill xmlns:a="http://schemas.openxmlformats.org/drawingml/2006/main">
-            <a:srgbClr val="2C6E73"/>
+            <a:srgbClr val="D9E0E6"/>
           </a:solidFill>
           <a:ln xmlns:a="http://schemas.openxmlformats.org/drawingml/2006/main" w="0">
-            <a:noFill/>
+            <a:solidFill>
+              <a:srgbClr val="D9E0E6"/>
+            </a:solidFill>
           </a:ln>
         </p:spPr>
       </p:sp>
@@ -8729,19 +8737,19 @@
           <p:cNvPr id="21" name="">
             <a:extLst xmlns:a="http://schemas.openxmlformats.org/drawingml/2006/main">
               <a:ext uri="{FF2B5EF4-FFF2-40B4-BE49-F238E27FC236}">
-                <a16:creationId xmlns:a16="http://schemas.microsoft.com/office/drawing/2014/main" id="{FD9307BD-0A87-4BF2-97ED-53613712DDAC}"/>
-              </a:ext>
-            </a:extLst>
-          </p:cNvPr>
-          <p:cNvSpPr>
-            <a:spLocks xmlns:a="http://schemas.openxmlformats.org/drawingml/2006/main" noGrp="1"/>
-          </p:cNvSpPr>
-          <p:nvPr/>
-        </p:nvSpPr>
-        <p:spPr>
-          <a:xfrm xmlns:a="http://schemas.openxmlformats.org/drawingml/2006/main">
-            <a:off x="1000125" y="4505325"/>
-            <a:ext cx="476250" cy="419100"/>
+                <a16:creationId xmlns:a16="http://schemas.microsoft.com/office/drawing/2014/main" id="{17832748-4D31-431F-9A52-0C8566087B51}"/>
+              </a:ext>
+            </a:extLst>
+          </p:cNvPr>
+          <p:cNvSpPr>
+            <a:spLocks xmlns:a="http://schemas.openxmlformats.org/drawingml/2006/main" noGrp="1"/>
+          </p:cNvSpPr>
+          <p:nvPr/>
+        </p:nvSpPr>
+        <p:spPr>
+          <a:xfrm xmlns:a="http://schemas.openxmlformats.org/drawingml/2006/main">
+            <a:off x="1162050" y="4314825"/>
+            <a:ext cx="400050" cy="400050"/>
           </a:xfrm>
           <a:prstGeom xmlns:a="http://schemas.openxmlformats.org/drawingml/2006/main" prst="rect">
             <a:avLst/>
@@ -8758,9 +8766,9 @@
           <a:lstStyle xmlns:a="http://schemas.openxmlformats.org/drawingml/2006/main"/>
           <a:p xmlns:a="http://schemas.openxmlformats.org/drawingml/2006/main">
             <a:pPr algn="ctr">
-              <a:defRPr sz="1350" b="1">
-                <a:solidFill>
-                  <a:srgbClr val="FFFFFF"/>
+              <a:defRPr sz="1125" b="1">
+                <a:solidFill>
+                  <a:srgbClr val="2C6E73"/>
                 </a:solidFill>
                 <a:latin typeface="Arial"/>
                 <a:ea typeface="Arial"/>
@@ -8768,9 +8776,9 @@
               </a:defRPr>
             </a:pPr>
             <a:r>
-              <a:rPr sz="1350" b="1">
-                <a:solidFill>
-                  <a:srgbClr val="FFFFFF"/>
+              <a:rPr sz="1125" b="1">
+                <a:solidFill>
+                  <a:srgbClr val="2C6E73"/>
                 </a:solidFill>
                 <a:latin typeface="Arial"/>
                 <a:ea typeface="Arial"/>
@@ -8786,19 +8794,19 @@
           <p:cNvPr id="22" name="">
             <a:extLst xmlns:a="http://schemas.openxmlformats.org/drawingml/2006/main">
               <a:ext uri="{FF2B5EF4-FFF2-40B4-BE49-F238E27FC236}">
-                <a16:creationId xmlns:a16="http://schemas.microsoft.com/office/drawing/2014/main" id="{29D9A847-487F-4D19-B474-B65056756F5C}"/>
-              </a:ext>
-            </a:extLst>
-          </p:cNvPr>
-          <p:cNvSpPr>
-            <a:spLocks xmlns:a="http://schemas.openxmlformats.org/drawingml/2006/main" noGrp="1"/>
-          </p:cNvSpPr>
-          <p:nvPr/>
-        </p:nvSpPr>
-        <p:spPr>
-          <a:xfrm xmlns:a="http://schemas.openxmlformats.org/drawingml/2006/main">
-            <a:off x="1714500" y="4410075"/>
-            <a:ext cx="9429750" cy="609600"/>
+                <a16:creationId xmlns:a16="http://schemas.microsoft.com/office/drawing/2014/main" id="{0C314BE1-55BB-40B2-88ED-1BAC36D9541E}"/>
+              </a:ext>
+            </a:extLst>
+          </p:cNvPr>
+          <p:cNvSpPr>
+            <a:spLocks xmlns:a="http://schemas.openxmlformats.org/drawingml/2006/main" noGrp="1"/>
+          </p:cNvSpPr>
+          <p:nvPr/>
+        </p:nvSpPr>
+        <p:spPr>
+          <a:xfrm xmlns:a="http://schemas.openxmlformats.org/drawingml/2006/main">
+            <a:off x="1714500" y="4229100"/>
+            <a:ext cx="9525000" cy="638175"/>
           </a:xfrm>
           <a:prstGeom xmlns:a="http://schemas.openxmlformats.org/drawingml/2006/main" prst="rect">
             <a:avLst/>
@@ -8815,9 +8823,9 @@
           <a:lstStyle xmlns:a="http://schemas.openxmlformats.org/drawingml/2006/main"/>
           <a:p xmlns:a="http://schemas.openxmlformats.org/drawingml/2006/main">
             <a:pPr algn="l">
-              <a:defRPr sz="1500" b="1">
-                <a:solidFill>
-                  <a:srgbClr val="2F785D"/>
+              <a:defRPr sz="1575" b="0">
+                <a:solidFill>
+                  <a:srgbClr val="17253A"/>
                 </a:solidFill>
                 <a:latin typeface="Arial"/>
                 <a:ea typeface="Arial"/>
@@ -8825,15 +8833,161 @@
               </a:defRPr>
             </a:pPr>
             <a:r>
-              <a:rPr sz="1500" b="1">
+              <a:rPr sz="1575" b="0">
+                <a:solidFill>
+                  <a:srgbClr val="17253A"/>
+                </a:solidFill>
+                <a:latin typeface="Arial"/>
+                <a:ea typeface="Arial"/>
+                <a:cs typeface="Arial"/>
+              </a:rPr>
+              <a:t>5 × 4 = 20</a:t>
+            </a:r>
+          </a:p>
+        </p:txBody>
+      </p:sp>
+      <p:sp>
+        <p:nvSpPr>
+          <p:cNvPr id="23" name="">
+            <a:extLst xmlns:a="http://schemas.openxmlformats.org/drawingml/2006/main">
+              <a:ext uri="{FF2B5EF4-FFF2-40B4-BE49-F238E27FC236}">
+                <a16:creationId xmlns:a16="http://schemas.microsoft.com/office/drawing/2014/main" id="{A5F5B736-4A77-4F72-85C8-A1A341878C1A}"/>
+              </a:ext>
+            </a:extLst>
+          </p:cNvPr>
+          <p:cNvSpPr>
+            <a:spLocks xmlns:a="http://schemas.openxmlformats.org/drawingml/2006/main" noGrp="1"/>
+          </p:cNvSpPr>
+          <p:nvPr/>
+        </p:nvSpPr>
+        <p:spPr>
+          <a:xfrm xmlns:a="http://schemas.openxmlformats.org/drawingml/2006/main">
+            <a:off x="1714500" y="4886325"/>
+            <a:ext cx="9334500" cy="9525"/>
+          </a:xfrm>
+          <a:prstGeom xmlns:a="http://schemas.openxmlformats.org/drawingml/2006/main" prst="rect">
+            <a:avLst/>
+          </a:prstGeom>
+          <a:solidFill xmlns:a="http://schemas.openxmlformats.org/drawingml/2006/main">
+            <a:srgbClr val="D9E0E6"/>
+          </a:solidFill>
+          <a:ln xmlns:a="http://schemas.openxmlformats.org/drawingml/2006/main" w="0">
+            <a:solidFill>
+              <a:srgbClr val="D9E0E6"/>
+            </a:solidFill>
+          </a:ln>
+        </p:spPr>
+      </p:sp>
+      <p:sp>
+        <p:nvSpPr>
+          <p:cNvPr id="24" name="">
+            <a:extLst xmlns:a="http://schemas.openxmlformats.org/drawingml/2006/main">
+              <a:ext uri="{FF2B5EF4-FFF2-40B4-BE49-F238E27FC236}">
+                <a16:creationId xmlns:a16="http://schemas.microsoft.com/office/drawing/2014/main" id="{530E712C-F258-4B01-B65B-16A9CF310BEF}"/>
+              </a:ext>
+            </a:extLst>
+          </p:cNvPr>
+          <p:cNvSpPr>
+            <a:spLocks xmlns:a="http://schemas.openxmlformats.org/drawingml/2006/main" noGrp="1"/>
+          </p:cNvSpPr>
+          <p:nvPr/>
+        </p:nvSpPr>
+        <p:spPr>
+          <a:xfrm xmlns:a="http://schemas.openxmlformats.org/drawingml/2006/main">
+            <a:off x="1162050" y="5019675"/>
+            <a:ext cx="400050" cy="400050"/>
+          </a:xfrm>
+          <a:prstGeom xmlns:a="http://schemas.openxmlformats.org/drawingml/2006/main" prst="rect">
+            <a:avLst/>
+          </a:prstGeom>
+          <a:noFill xmlns:a="http://schemas.openxmlformats.org/drawingml/2006/main"/>
+          <a:ln xmlns:a="http://schemas.openxmlformats.org/drawingml/2006/main" w="0">
+            <a:noFill/>
+          </a:ln>
+        </p:spPr>
+        <p:txBody>
+          <a:bodyPr xmlns:a="http://schemas.openxmlformats.org/drawingml/2006/main" anchor="ctr">
+            <a:normAutofit fontScale="100000"/>
+          </a:bodyPr>
+          <a:lstStyle xmlns:a="http://schemas.openxmlformats.org/drawingml/2006/main"/>
+          <a:p xmlns:a="http://schemas.openxmlformats.org/drawingml/2006/main">
+            <a:pPr algn="ctr">
+              <a:defRPr sz="1125" b="1">
                 <a:solidFill>
                   <a:srgbClr val="2F785D"/>
                 </a:solidFill>
                 <a:latin typeface="Arial"/>
                 <a:ea typeface="Arial"/>
                 <a:cs typeface="Arial"/>
+              </a:defRPr>
+            </a:pPr>
+            <a:r>
+              <a:rPr sz="1125" b="1">
+                <a:solidFill>
+                  <a:srgbClr val="2F785D"/>
+                </a:solidFill>
+                <a:latin typeface="Arial"/>
+                <a:ea typeface="Arial"/>
+                <a:cs typeface="Arial"/>
               </a:rPr>
-              <a:t>Check the result: Compare the new forms and justify the conclusion.</a:t>
+              <a:t>5</a:t>
+            </a:r>
+          </a:p>
+        </p:txBody>
+      </p:sp>
+      <p:sp>
+        <p:nvSpPr>
+          <p:cNvPr id="25" name="">
+            <a:extLst xmlns:a="http://schemas.openxmlformats.org/drawingml/2006/main">
+              <a:ext uri="{FF2B5EF4-FFF2-40B4-BE49-F238E27FC236}">
+                <a16:creationId xmlns:a16="http://schemas.microsoft.com/office/drawing/2014/main" id="{EF6E40C7-05ED-44F8-BD0B-36F6E83ECEA0}"/>
+              </a:ext>
+            </a:extLst>
+          </p:cNvPr>
+          <p:cNvSpPr>
+            <a:spLocks xmlns:a="http://schemas.openxmlformats.org/drawingml/2006/main" noGrp="1"/>
+          </p:cNvSpPr>
+          <p:nvPr/>
+        </p:nvSpPr>
+        <p:spPr>
+          <a:xfrm xmlns:a="http://schemas.openxmlformats.org/drawingml/2006/main">
+            <a:off x="1714500" y="4933950"/>
+            <a:ext cx="9525000" cy="638175"/>
+          </a:xfrm>
+          <a:prstGeom xmlns:a="http://schemas.openxmlformats.org/drawingml/2006/main" prst="rect">
+            <a:avLst/>
+          </a:prstGeom>
+          <a:noFill xmlns:a="http://schemas.openxmlformats.org/drawingml/2006/main"/>
+          <a:ln xmlns:a="http://schemas.openxmlformats.org/drawingml/2006/main" w="0">
+            <a:noFill/>
+          </a:ln>
+        </p:spPr>
+        <p:txBody>
+          <a:bodyPr xmlns:a="http://schemas.openxmlformats.org/drawingml/2006/main" anchor="ctr">
+            <a:normAutofit fontScale="100000"/>
+          </a:bodyPr>
+          <a:lstStyle xmlns:a="http://schemas.openxmlformats.org/drawingml/2006/main"/>
+          <a:p xmlns:a="http://schemas.openxmlformats.org/drawingml/2006/main">
+            <a:pPr algn="l">
+              <a:defRPr sz="1575" b="1">
+                <a:solidFill>
+                  <a:srgbClr val="2F785D"/>
+                </a:solidFill>
+                <a:latin typeface="Arial"/>
+                <a:ea typeface="Arial"/>
+                <a:cs typeface="Arial"/>
+              </a:defRPr>
+            </a:pPr>
+            <a:r>
+              <a:rPr sz="1575" b="1">
+                <a:solidFill>
+                  <a:srgbClr val="2F785D"/>
+                </a:solidFill>
+                <a:latin typeface="Arial"/>
+                <a:ea typeface="Arial"/>
+                <a:cs typeface="Arial"/>
+              </a:rPr>
+              <a:t>5/6 = 20/24</a:t>
             </a:r>
           </a:p>
         </p:txBody>
@@ -8841,7 +8995,7 @@
     </p:spTree>
     <p:extLst>
       <p:ext uri="{BB962C8B-B14F-4D97-AF65-F5344CB8AC3E}">
-        <p14:creationId xmlns:p14="http://schemas.microsoft.com/office/powerpoint/2010/main" val="153205395"/>
+        <p14:creationId xmlns:p14="http://schemas.microsoft.com/office/powerpoint/2010/main" val="1380653654"/>
       </p:ext>
     </p:extLst>
   </p:cSld>
@@ -9078,6 +9232,51 @@
                       </p:childTnLst>
                     </p:cTn>
                   </p:par>
+                  <p:par>
+                    <p:cTn id="23" fill="hold">
+                      <p:stCondLst>
+                        <p:cond delay="indefinite"/>
+                      </p:stCondLst>
+                      <p:childTnLst>
+                        <p:par>
+                          <p:cTn id="24" fill="hold">
+                            <p:stCondLst>
+                              <p:cond delay="0"/>
+                            </p:stCondLst>
+                            <p:childTnLst>
+                              <p:par>
+                                <p:cTn id="25" presetID="1" presetClass="entr" presetSubtype="0" fill="hold" grpId="0" nodeType="clickEffect">
+                                  <p:stCondLst>
+                                    <p:cond delay="0"/>
+                                  </p:stCondLst>
+                                  <p:childTnLst>
+                                    <p:set>
+                                      <p:cBhvr>
+                                        <p:cTn id="26" dur="1" fill="hold">
+                                          <p:stCondLst>
+                                            <p:cond delay="0"/>
+                                          </p:stCondLst>
+                                        </p:cTn>
+                                        <p:tgtEl>
+                                          <p:spTgt spid="25"/>
+                                        </p:tgtEl>
+                                        <p:attrNameLst>
+                                          <p:attrName>style.visibility</p:attrName>
+                                        </p:attrNameLst>
+                                      </p:cBhvr>
+                                      <p:to>
+                                        <p:strVal val="visible"/>
+                                      </p:to>
+                                    </p:set>
+                                  </p:childTnLst>
+                                </p:cTn>
+                              </p:par>
+                            </p:childTnLst>
+                          </p:cTn>
+                        </p:par>
+                      </p:childTnLst>
+                    </p:cTn>
+                  </p:par>
                 </p:childTnLst>
               </p:cTn>
               <p:prevCondLst>
@@ -9105,6 +9304,7 @@
       <p:bldP spid="16" grpId="0"/>
       <p:bldP spid="19" grpId="0"/>
       <p:bldP spid="22" grpId="0"/>
+      <p:bldP spid="25" grpId="0"/>
     </p:bldLst>
   </p:timing>
 </p:sld>
@@ -9134,7 +9334,7 @@
           <p:cNvPr id="15" name="">
             <a:extLst xmlns:a="http://schemas.openxmlformats.org/drawingml/2006/main">
               <a:ext uri="{FF2B5EF4-FFF2-40B4-BE49-F238E27FC236}">
-                <a16:creationId xmlns:a16="http://schemas.microsoft.com/office/drawing/2014/main" id="{6D9640FB-66F6-427F-A4FA-44AA9AFC7A9E}"/>
+                <a16:creationId xmlns:a16="http://schemas.microsoft.com/office/drawing/2014/main" id="{B2E3F19F-FEB1-48B6-BED8-18A4D6ABA9B7}"/>
               </a:ext>
             </a:extLst>
           </p:cNvPr>
@@ -9166,7 +9366,7 @@
           <p:cNvPr id="2" name="">
             <a:extLst xmlns:a="http://schemas.openxmlformats.org/drawingml/2006/main">
               <a:ext uri="{FF2B5EF4-FFF2-40B4-BE49-F238E27FC236}">
-                <a16:creationId xmlns:a16="http://schemas.microsoft.com/office/drawing/2014/main" id="{E55BF9DA-2618-482E-98EE-E35B78D25B10}"/>
+                <a16:creationId xmlns:a16="http://schemas.microsoft.com/office/drawing/2014/main" id="{F7627802-F8FB-4168-AE95-7EEAAA6A1E33}"/>
               </a:ext>
             </a:extLst>
           </p:cNvPr>
@@ -9223,7 +9423,7 @@
           <p:cNvPr id="3" name="">
             <a:extLst xmlns:a="http://schemas.openxmlformats.org/drawingml/2006/main">
               <a:ext uri="{FF2B5EF4-FFF2-40B4-BE49-F238E27FC236}">
-                <a16:creationId xmlns:a16="http://schemas.microsoft.com/office/drawing/2014/main" id="{AF39846E-33B0-4711-BB83-06EE6D204ED7}"/>
+                <a16:creationId xmlns:a16="http://schemas.microsoft.com/office/drawing/2014/main" id="{1643F586-A1C1-4A0D-BB73-C206F52C8AE6}"/>
               </a:ext>
             </a:extLst>
           </p:cNvPr>
@@ -9255,7 +9455,7 @@
           <p:cNvPr id="4" name="">
             <a:extLst xmlns:a="http://schemas.openxmlformats.org/drawingml/2006/main">
               <a:ext uri="{FF2B5EF4-FFF2-40B4-BE49-F238E27FC236}">
-                <a16:creationId xmlns:a16="http://schemas.microsoft.com/office/drawing/2014/main" id="{8AA79D19-D8EC-4649-A808-965F362C2F96}"/>
+                <a16:creationId xmlns:a16="http://schemas.microsoft.com/office/drawing/2014/main" id="{42F35BF5-B621-4CD0-8AF4-2A2250ECDFEC}"/>
               </a:ext>
             </a:extLst>
           </p:cNvPr>
@@ -9312,7 +9512,7 @@
           <p:cNvPr id="5" name="">
             <a:extLst xmlns:a="http://schemas.openxmlformats.org/drawingml/2006/main">
               <a:ext uri="{FF2B5EF4-FFF2-40B4-BE49-F238E27FC236}">
-                <a16:creationId xmlns:a16="http://schemas.microsoft.com/office/drawing/2014/main" id="{761C4E47-4584-4338-B3E1-08363F092862}"/>
+                <a16:creationId xmlns:a16="http://schemas.microsoft.com/office/drawing/2014/main" id="{B92A2392-3FD2-4872-BFF7-3A0DD9148396}"/>
               </a:ext>
             </a:extLst>
           </p:cNvPr>
@@ -9369,7 +9569,7 @@
           <p:cNvPr id="6" name="">
             <a:extLst xmlns:a="http://schemas.openxmlformats.org/drawingml/2006/main">
               <a:ext uri="{FF2B5EF4-FFF2-40B4-BE49-F238E27FC236}">
-                <a16:creationId xmlns:a16="http://schemas.microsoft.com/office/drawing/2014/main" id="{B4A2C141-8C2A-4391-8194-821A9D6EABFA}"/>
+                <a16:creationId xmlns:a16="http://schemas.microsoft.com/office/drawing/2014/main" id="{B20C8D3D-119D-48C3-8413-7494C11126C1}"/>
               </a:ext>
             </a:extLst>
           </p:cNvPr>
@@ -9426,7 +9626,7 @@
           <p:cNvPr id="7" name="">
             <a:extLst xmlns:a="http://schemas.openxmlformats.org/drawingml/2006/main">
               <a:ext uri="{FF2B5EF4-FFF2-40B4-BE49-F238E27FC236}">
-                <a16:creationId xmlns:a16="http://schemas.microsoft.com/office/drawing/2014/main" id="{85907A83-14A9-4764-93EC-565B50FA921E}"/>
+                <a16:creationId xmlns:a16="http://schemas.microsoft.com/office/drawing/2014/main" id="{0C8351B8-BC78-4361-B548-65DAF6EA787D}"/>
               </a:ext>
             </a:extLst>
           </p:cNvPr>
@@ -9458,7 +9658,7 @@
           <p:cNvPr id="8" name="">
             <a:extLst xmlns:a="http://schemas.openxmlformats.org/drawingml/2006/main">
               <a:ext uri="{FF2B5EF4-FFF2-40B4-BE49-F238E27FC236}">
-                <a16:creationId xmlns:a16="http://schemas.microsoft.com/office/drawing/2014/main" id="{452C94D8-7018-4021-8623-30133BD8750D}"/>
+                <a16:creationId xmlns:a16="http://schemas.microsoft.com/office/drawing/2014/main" id="{0A5F33EB-D98A-42EE-8D17-6F165F5A6721}"/>
               </a:ext>
             </a:extLst>
           </p:cNvPr>
@@ -9515,7 +9715,7 @@
           <p:cNvPr id="9" name="">
             <a:extLst xmlns:a="http://schemas.openxmlformats.org/drawingml/2006/main">
               <a:ext uri="{FF2B5EF4-FFF2-40B4-BE49-F238E27FC236}">
-                <a16:creationId xmlns:a16="http://schemas.microsoft.com/office/drawing/2014/main" id="{B0A4E25F-592D-486F-A298-4C059559F02E}"/>
+                <a16:creationId xmlns:a16="http://schemas.microsoft.com/office/drawing/2014/main" id="{2363506B-64CD-4DFD-A439-64321DD0E325}"/>
               </a:ext>
             </a:extLst>
           </p:cNvPr>
@@ -9572,7 +9772,7 @@
           <p:cNvPr id="10" name="">
             <a:extLst xmlns:a="http://schemas.openxmlformats.org/drawingml/2006/main">
               <a:ext uri="{FF2B5EF4-FFF2-40B4-BE49-F238E27FC236}">
-                <a16:creationId xmlns:a16="http://schemas.microsoft.com/office/drawing/2014/main" id="{3EFFCDB9-0651-4249-BD2A-9076B2BCD54C}"/>
+                <a16:creationId xmlns:a16="http://schemas.microsoft.com/office/drawing/2014/main" id="{5D35223A-1764-4117-B911-D7A558D1C83B}"/>
               </a:ext>
             </a:extLst>
           </p:cNvPr>
@@ -9629,7 +9829,7 @@
           <p:cNvPr id="11" name="">
             <a:extLst xmlns:a="http://schemas.openxmlformats.org/drawingml/2006/main">
               <a:ext uri="{FF2B5EF4-FFF2-40B4-BE49-F238E27FC236}">
-                <a16:creationId xmlns:a16="http://schemas.microsoft.com/office/drawing/2014/main" id="{371E585D-CCC4-43DD-98D7-81131FEFE627}"/>
+                <a16:creationId xmlns:a16="http://schemas.microsoft.com/office/drawing/2014/main" id="{607C1C4E-CBD1-4C43-B17F-BF890234DD8D}"/>
               </a:ext>
             </a:extLst>
           </p:cNvPr>
@@ -9686,7 +9886,7 @@
           <p:cNvPr id="12" name="">
             <a:extLst xmlns:a="http://schemas.openxmlformats.org/drawingml/2006/main">
               <a:ext uri="{FF2B5EF4-FFF2-40B4-BE49-F238E27FC236}">
-                <a16:creationId xmlns:a16="http://schemas.microsoft.com/office/drawing/2014/main" id="{B4A06440-02E4-4D2C-A0B9-11BF6D3DB343}"/>
+                <a16:creationId xmlns:a16="http://schemas.microsoft.com/office/drawing/2014/main" id="{DAA584F5-E4E7-4C79-BDFC-E2F8D49ADF45}"/>
               </a:ext>
             </a:extLst>
           </p:cNvPr>
@@ -9718,7 +9918,7 @@
           <p:cNvPr id="13" name="">
             <a:extLst xmlns:a="http://schemas.openxmlformats.org/drawingml/2006/main">
               <a:ext uri="{FF2B5EF4-FFF2-40B4-BE49-F238E27FC236}">
-                <a16:creationId xmlns:a16="http://schemas.microsoft.com/office/drawing/2014/main" id="{50966469-53CA-42A1-86B9-9595F6077A34}"/>
+                <a16:creationId xmlns:a16="http://schemas.microsoft.com/office/drawing/2014/main" id="{9BD90389-475A-4FFD-AE77-974755EE9E8B}"/>
               </a:ext>
             </a:extLst>
           </p:cNvPr>
@@ -9775,7 +9975,7 @@
           <p:cNvPr id="14" name="">
             <a:extLst xmlns:a="http://schemas.openxmlformats.org/drawingml/2006/main">
               <a:ext uri="{FF2B5EF4-FFF2-40B4-BE49-F238E27FC236}">
-                <a16:creationId xmlns:a16="http://schemas.microsoft.com/office/drawing/2014/main" id="{F253CB91-8603-4775-B081-E0072DFA282A}"/>
+                <a16:creationId xmlns:a16="http://schemas.microsoft.com/office/drawing/2014/main" id="{EBB87CB4-1B95-4CF1-8FA6-BAD4C25FE0F6}"/>
               </a:ext>
             </a:extLst>
           </p:cNvPr>
@@ -9830,7 +10030,7 @@
     </p:spTree>
     <p:extLst>
       <p:ext uri="{BB962C8B-B14F-4D97-AF65-F5344CB8AC3E}">
-        <p14:creationId xmlns:p14="http://schemas.microsoft.com/office/powerpoint/2010/main" val="1990993877"/>
+        <p14:creationId xmlns:p14="http://schemas.microsoft.com/office/powerpoint/2010/main" val="1558676700"/>
       </p:ext>
     </p:extLst>
   </p:cSld>
@@ -10031,7 +10231,7 @@
           <p:cNvPr id="16" name="">
             <a:extLst xmlns:a="http://schemas.openxmlformats.org/drawingml/2006/main">
               <a:ext uri="{FF2B5EF4-FFF2-40B4-BE49-F238E27FC236}">
-                <a16:creationId xmlns:a16="http://schemas.microsoft.com/office/drawing/2014/main" id="{955D66B1-5ABF-422F-BF30-F770E216870F}"/>
+                <a16:creationId xmlns:a16="http://schemas.microsoft.com/office/drawing/2014/main" id="{9CBD71C7-ECF9-4CC4-8E98-6E6DB2A18CE9}"/>
               </a:ext>
             </a:extLst>
           </p:cNvPr>
@@ -10063,7 +10263,7 @@
           <p:cNvPr id="2" name="">
             <a:extLst xmlns:a="http://schemas.openxmlformats.org/drawingml/2006/main">
               <a:ext uri="{FF2B5EF4-FFF2-40B4-BE49-F238E27FC236}">
-                <a16:creationId xmlns:a16="http://schemas.microsoft.com/office/drawing/2014/main" id="{CB695B52-EEF1-4549-9E65-9AF18BFB2444}"/>
+                <a16:creationId xmlns:a16="http://schemas.microsoft.com/office/drawing/2014/main" id="{AD6876BE-9019-4635-8BAD-E447C4F76CBF}"/>
               </a:ext>
             </a:extLst>
           </p:cNvPr>
@@ -10120,7 +10320,7 @@
           <p:cNvPr id="3" name="">
             <a:extLst xmlns:a="http://schemas.openxmlformats.org/drawingml/2006/main">
               <a:ext uri="{FF2B5EF4-FFF2-40B4-BE49-F238E27FC236}">
-                <a16:creationId xmlns:a16="http://schemas.microsoft.com/office/drawing/2014/main" id="{C57B2151-2EA7-4412-B51F-B6276E91FA9D}"/>
+                <a16:creationId xmlns:a16="http://schemas.microsoft.com/office/drawing/2014/main" id="{382865D8-AFE7-4BDC-88F0-CC84B86C4AC3}"/>
               </a:ext>
             </a:extLst>
           </p:cNvPr>
@@ -10152,7 +10352,7 @@
           <p:cNvPr id="4" name="">
             <a:extLst xmlns:a="http://schemas.openxmlformats.org/drawingml/2006/main">
               <a:ext uri="{FF2B5EF4-FFF2-40B4-BE49-F238E27FC236}">
-                <a16:creationId xmlns:a16="http://schemas.microsoft.com/office/drawing/2014/main" id="{955A3EED-B794-4A24-B02B-E452BF797FB5}"/>
+                <a16:creationId xmlns:a16="http://schemas.microsoft.com/office/drawing/2014/main" id="{91A13745-1FDE-4C7D-BD66-54E4196E20B6}"/>
               </a:ext>
             </a:extLst>
           </p:cNvPr>
@@ -10209,7 +10409,7 @@
           <p:cNvPr id="5" name="">
             <a:extLst xmlns:a="http://schemas.openxmlformats.org/drawingml/2006/main">
               <a:ext uri="{FF2B5EF4-FFF2-40B4-BE49-F238E27FC236}">
-                <a16:creationId xmlns:a16="http://schemas.microsoft.com/office/drawing/2014/main" id="{E9BC5077-E7DE-4E49-9EEE-B1C660E21AD2}"/>
+                <a16:creationId xmlns:a16="http://schemas.microsoft.com/office/drawing/2014/main" id="{141CD2A7-F2CC-4DAF-92C8-FA143B2520AF}"/>
               </a:ext>
             </a:extLst>
           </p:cNvPr>
@@ -10266,7 +10466,7 @@
           <p:cNvPr id="6" name="">
             <a:extLst xmlns:a="http://schemas.openxmlformats.org/drawingml/2006/main">
               <a:ext uri="{FF2B5EF4-FFF2-40B4-BE49-F238E27FC236}">
-                <a16:creationId xmlns:a16="http://schemas.microsoft.com/office/drawing/2014/main" id="{4731BE42-89E4-468B-8603-D556CA0D2703}"/>
+                <a16:creationId xmlns:a16="http://schemas.microsoft.com/office/drawing/2014/main" id="{E2BEDC45-611E-49C8-9836-7A11B02C1AA0}"/>
               </a:ext>
             </a:extLst>
           </p:cNvPr>
@@ -10323,7 +10523,7 @@
           <p:cNvPr id="7" name="">
             <a:extLst xmlns:a="http://schemas.openxmlformats.org/drawingml/2006/main">
               <a:ext uri="{FF2B5EF4-FFF2-40B4-BE49-F238E27FC236}">
-                <a16:creationId xmlns:a16="http://schemas.microsoft.com/office/drawing/2014/main" id="{05E69909-AEB5-46E1-81C6-2E4379F28894}"/>
+                <a16:creationId xmlns:a16="http://schemas.microsoft.com/office/drawing/2014/main" id="{BD8EB326-31BD-4855-8AF7-9E29E859A9FC}"/>
               </a:ext>
             </a:extLst>
           </p:cNvPr>
@@ -10355,7 +10555,7 @@
           <p:cNvPr id="8" name="">
             <a:extLst xmlns:a="http://schemas.openxmlformats.org/drawingml/2006/main">
               <a:ext uri="{FF2B5EF4-FFF2-40B4-BE49-F238E27FC236}">
-                <a16:creationId xmlns:a16="http://schemas.microsoft.com/office/drawing/2014/main" id="{59466888-98A7-4399-BB85-2E17AED06894}"/>
+                <a16:creationId xmlns:a16="http://schemas.microsoft.com/office/drawing/2014/main" id="{752176D0-1E10-4B1B-8B6D-681F07E49D43}"/>
               </a:ext>
             </a:extLst>
           </p:cNvPr>
@@ -10412,7 +10612,7 @@
           <p:cNvPr id="9" name="">
             <a:extLst xmlns:a="http://schemas.openxmlformats.org/drawingml/2006/main">
               <a:ext uri="{FF2B5EF4-FFF2-40B4-BE49-F238E27FC236}">
-                <a16:creationId xmlns:a16="http://schemas.microsoft.com/office/drawing/2014/main" id="{A0A865C0-B71D-4537-845C-BB7DB82D9661}"/>
+                <a16:creationId xmlns:a16="http://schemas.microsoft.com/office/drawing/2014/main" id="{4DA122C0-5826-4335-9C86-BD11E917E764}"/>
               </a:ext>
             </a:extLst>
           </p:cNvPr>
@@ -10469,7 +10669,7 @@
           <p:cNvPr id="10" name="">
             <a:extLst xmlns:a="http://schemas.openxmlformats.org/drawingml/2006/main">
               <a:ext uri="{FF2B5EF4-FFF2-40B4-BE49-F238E27FC236}">
-                <a16:creationId xmlns:a16="http://schemas.microsoft.com/office/drawing/2014/main" id="{1FC75E84-C212-48E5-8B09-C9C1C26AF7FC}"/>
+                <a16:creationId xmlns:a16="http://schemas.microsoft.com/office/drawing/2014/main" id="{AF40492A-76BB-4EE5-A5A0-AC684BC7F99A}"/>
               </a:ext>
             </a:extLst>
           </p:cNvPr>
@@ -10526,7 +10726,7 @@
           <p:cNvPr id="11" name="">
             <a:extLst xmlns:a="http://schemas.openxmlformats.org/drawingml/2006/main">
               <a:ext uri="{FF2B5EF4-FFF2-40B4-BE49-F238E27FC236}">
-                <a16:creationId xmlns:a16="http://schemas.microsoft.com/office/drawing/2014/main" id="{0150574D-2BEA-4383-9A9D-F61C2DE0254C}"/>
+                <a16:creationId xmlns:a16="http://schemas.microsoft.com/office/drawing/2014/main" id="{42B5E6FC-489C-4E49-ACC7-A895E31BEB23}"/>
               </a:ext>
             </a:extLst>
           </p:cNvPr>
@@ -10583,7 +10783,7 @@
           <p:cNvPr id="12" name="">
             <a:extLst xmlns:a="http://schemas.openxmlformats.org/drawingml/2006/main">
               <a:ext uri="{FF2B5EF4-FFF2-40B4-BE49-F238E27FC236}">
-                <a16:creationId xmlns:a16="http://schemas.microsoft.com/office/drawing/2014/main" id="{7E3DBFDA-3CC6-4FB8-BB2E-ED1AB7639248}"/>
+                <a16:creationId xmlns:a16="http://schemas.microsoft.com/office/drawing/2014/main" id="{373C2A94-38ED-4E75-83A3-9DAA0CDE0D51}"/>
               </a:ext>
             </a:extLst>
           </p:cNvPr>
@@ -10640,7 +10840,7 @@
           <p:cNvPr id="13" name="">
             <a:extLst xmlns:a="http://schemas.openxmlformats.org/drawingml/2006/main">
               <a:ext uri="{FF2B5EF4-FFF2-40B4-BE49-F238E27FC236}">
-                <a16:creationId xmlns:a16="http://schemas.microsoft.com/office/drawing/2014/main" id="{9C23A5EF-4607-4295-8F4D-7900B2E0F54A}"/>
+                <a16:creationId xmlns:a16="http://schemas.microsoft.com/office/drawing/2014/main" id="{634170A0-9CDE-448A-A974-5EEEDC580E65}"/>
               </a:ext>
             </a:extLst>
           </p:cNvPr>
@@ -10697,7 +10897,7 @@
           <p:cNvPr id="14" name="">
             <a:extLst xmlns:a="http://schemas.openxmlformats.org/drawingml/2006/main">
               <a:ext uri="{FF2B5EF4-FFF2-40B4-BE49-F238E27FC236}">
-                <a16:creationId xmlns:a16="http://schemas.microsoft.com/office/drawing/2014/main" id="{F4CCCD5B-3963-48A9-B6D7-36468F8BDD4B}"/>
+                <a16:creationId xmlns:a16="http://schemas.microsoft.com/office/drawing/2014/main" id="{81C6BEAA-0C33-44AE-BCA1-EF0DC0D8EE9B}"/>
               </a:ext>
             </a:extLst>
           </p:cNvPr>
@@ -10754,7 +10954,7 @@
           <p:cNvPr id="15" name="">
             <a:extLst xmlns:a="http://schemas.openxmlformats.org/drawingml/2006/main">
               <a:ext uri="{FF2B5EF4-FFF2-40B4-BE49-F238E27FC236}">
-                <a16:creationId xmlns:a16="http://schemas.microsoft.com/office/drawing/2014/main" id="{A645A212-5009-4CE8-AA47-0A4AC8A4BB9B}"/>
+                <a16:creationId xmlns:a16="http://schemas.microsoft.com/office/drawing/2014/main" id="{001A7C0F-BB73-491E-9A75-E6F02C1453F1}"/>
               </a:ext>
             </a:extLst>
           </p:cNvPr>
@@ -10809,7 +11009,7 @@
     </p:spTree>
     <p:extLst>
       <p:ext uri="{BB962C8B-B14F-4D97-AF65-F5344CB8AC3E}">
-        <p14:creationId xmlns:p14="http://schemas.microsoft.com/office/powerpoint/2010/main" val="1045996419"/>
+        <p14:creationId xmlns:p14="http://schemas.microsoft.com/office/powerpoint/2010/main" val="1855555007"/>
       </p:ext>
     </p:extLst>
   </p:cSld>
@@ -10964,7 +11164,7 @@
           <p:cNvPr id="16" name="">
             <a:extLst xmlns:a="http://schemas.openxmlformats.org/drawingml/2006/main">
               <a:ext uri="{FF2B5EF4-FFF2-40B4-BE49-F238E27FC236}">
-                <a16:creationId xmlns:a16="http://schemas.microsoft.com/office/drawing/2014/main" id="{D32DF798-C5EE-488A-B660-DF779520243E}"/>
+                <a16:creationId xmlns:a16="http://schemas.microsoft.com/office/drawing/2014/main" id="{A8902E32-CC96-4387-9779-C62311536F4E}"/>
               </a:ext>
             </a:extLst>
           </p:cNvPr>
@@ -10996,7 +11196,7 @@
           <p:cNvPr id="2" name="">
             <a:extLst xmlns:a="http://schemas.openxmlformats.org/drawingml/2006/main">
               <a:ext uri="{FF2B5EF4-FFF2-40B4-BE49-F238E27FC236}">
-                <a16:creationId xmlns:a16="http://schemas.microsoft.com/office/drawing/2014/main" id="{4614B7B2-F331-4D14-B1DF-8A7CB37D4AC5}"/>
+                <a16:creationId xmlns:a16="http://schemas.microsoft.com/office/drawing/2014/main" id="{09D96A82-0F7C-423F-BA7C-00F80A98159A}"/>
               </a:ext>
             </a:extLst>
           </p:cNvPr>
@@ -11053,7 +11253,7 @@
           <p:cNvPr id="3" name="">
             <a:extLst xmlns:a="http://schemas.openxmlformats.org/drawingml/2006/main">
               <a:ext uri="{FF2B5EF4-FFF2-40B4-BE49-F238E27FC236}">
-                <a16:creationId xmlns:a16="http://schemas.microsoft.com/office/drawing/2014/main" id="{94A63209-6964-4A5C-8082-6B8DE2D3F82A}"/>
+                <a16:creationId xmlns:a16="http://schemas.microsoft.com/office/drawing/2014/main" id="{D99E21F0-9C9D-42AE-9829-EE0442FE10F6}"/>
               </a:ext>
             </a:extLst>
           </p:cNvPr>
@@ -11085,7 +11285,7 @@
           <p:cNvPr id="4" name="">
             <a:extLst xmlns:a="http://schemas.openxmlformats.org/drawingml/2006/main">
               <a:ext uri="{FF2B5EF4-FFF2-40B4-BE49-F238E27FC236}">
-                <a16:creationId xmlns:a16="http://schemas.microsoft.com/office/drawing/2014/main" id="{DCFD43FD-CEB1-48E0-B02E-C911B7629F5D}"/>
+                <a16:creationId xmlns:a16="http://schemas.microsoft.com/office/drawing/2014/main" id="{F997CDA7-BB84-446F-BD3C-A12B825B13B5}"/>
               </a:ext>
             </a:extLst>
           </p:cNvPr>
@@ -11142,7 +11342,7 @@
           <p:cNvPr id="5" name="">
             <a:extLst xmlns:a="http://schemas.openxmlformats.org/drawingml/2006/main">
               <a:ext uri="{FF2B5EF4-FFF2-40B4-BE49-F238E27FC236}">
-                <a16:creationId xmlns:a16="http://schemas.microsoft.com/office/drawing/2014/main" id="{21329631-C209-4647-8E55-CBB06F895FDB}"/>
+                <a16:creationId xmlns:a16="http://schemas.microsoft.com/office/drawing/2014/main" id="{5DC78E60-644D-4745-AC45-CE693D32A7F8}"/>
               </a:ext>
             </a:extLst>
           </p:cNvPr>
@@ -11199,7 +11399,7 @@
           <p:cNvPr id="6" name="">
             <a:extLst xmlns:a="http://schemas.openxmlformats.org/drawingml/2006/main">
               <a:ext uri="{FF2B5EF4-FFF2-40B4-BE49-F238E27FC236}">
-                <a16:creationId xmlns:a16="http://schemas.microsoft.com/office/drawing/2014/main" id="{328402BF-4A9F-4479-ACDA-F675EA2B1558}"/>
+                <a16:creationId xmlns:a16="http://schemas.microsoft.com/office/drawing/2014/main" id="{42E842F0-0715-41DB-8C53-F9951A7ECC1E}"/>
               </a:ext>
             </a:extLst>
           </p:cNvPr>
@@ -11256,7 +11456,7 @@
           <p:cNvPr id="7" name="">
             <a:extLst xmlns:a="http://schemas.openxmlformats.org/drawingml/2006/main">
               <a:ext uri="{FF2B5EF4-FFF2-40B4-BE49-F238E27FC236}">
-                <a16:creationId xmlns:a16="http://schemas.microsoft.com/office/drawing/2014/main" id="{5AC598DF-C9CE-4D05-83A9-8CF3732A0C9F}"/>
+                <a16:creationId xmlns:a16="http://schemas.microsoft.com/office/drawing/2014/main" id="{D97310AA-5DA7-420B-92ED-AE94FA42C175}"/>
               </a:ext>
             </a:extLst>
           </p:cNvPr>
@@ -11288,7 +11488,7 @@
           <p:cNvPr id="8" name="">
             <a:extLst xmlns:a="http://schemas.openxmlformats.org/drawingml/2006/main">
               <a:ext uri="{FF2B5EF4-FFF2-40B4-BE49-F238E27FC236}">
-                <a16:creationId xmlns:a16="http://schemas.microsoft.com/office/drawing/2014/main" id="{D94E5715-6786-4A31-BD7A-FDD903B7E0F1}"/>
+                <a16:creationId xmlns:a16="http://schemas.microsoft.com/office/drawing/2014/main" id="{2C3BA9FC-D1E2-46BD-87BF-07C6195474CC}"/>
               </a:ext>
             </a:extLst>
           </p:cNvPr>
@@ -11345,7 +11545,7 @@
           <p:cNvPr id="9" name="">
             <a:extLst xmlns:a="http://schemas.openxmlformats.org/drawingml/2006/main">
               <a:ext uri="{FF2B5EF4-FFF2-40B4-BE49-F238E27FC236}">
-                <a16:creationId xmlns:a16="http://schemas.microsoft.com/office/drawing/2014/main" id="{75EC635D-7099-4CFB-8636-6997B11A267E}"/>
+                <a16:creationId xmlns:a16="http://schemas.microsoft.com/office/drawing/2014/main" id="{6F305CA9-ABEF-4084-872F-53D416068BD7}"/>
               </a:ext>
             </a:extLst>
           </p:cNvPr>
@@ -11406,7 +11606,7 @@
           <p:nvPr/>
         </p:nvPicPr>
         <p:blipFill>
-          <a:blip xmlns:r="http://schemas.openxmlformats.org/officeDocument/2006/relationships" xmlns:a="http://schemas.openxmlformats.org/drawingml/2006/main" r:embed="R3414909200e84130"/>
+          <a:blip xmlns:r="http://schemas.openxmlformats.org/officeDocument/2006/relationships" xmlns:a="http://schemas.openxmlformats.org/drawingml/2006/main" r:embed="R7f463f24fc274d12"/>
           <a:stretch xmlns:a="http://schemas.openxmlformats.org/drawingml/2006/main"/>
         </p:blipFill>
         <p:spPr>
@@ -11424,7 +11624,7 @@
           <p:cNvPr id="11" name="">
             <a:extLst xmlns:a="http://schemas.openxmlformats.org/drawingml/2006/main">
               <a:ext uri="{FF2B5EF4-FFF2-40B4-BE49-F238E27FC236}">
-                <a16:creationId xmlns:a16="http://schemas.microsoft.com/office/drawing/2014/main" id="{49B17935-E372-46C7-BEA1-DC9CDA447919}"/>
+                <a16:creationId xmlns:a16="http://schemas.microsoft.com/office/drawing/2014/main" id="{EAA01868-FB88-4A04-83F8-18986B1A4941}"/>
               </a:ext>
             </a:extLst>
           </p:cNvPr>
@@ -11481,7 +11681,7 @@
           <p:cNvPr id="12" name="">
             <a:extLst xmlns:a="http://schemas.openxmlformats.org/drawingml/2006/main">
               <a:ext uri="{FF2B5EF4-FFF2-40B4-BE49-F238E27FC236}">
-                <a16:creationId xmlns:a16="http://schemas.microsoft.com/office/drawing/2014/main" id="{E83ADF74-9C62-4192-8E27-6ED0E27BE2E4}"/>
+                <a16:creationId xmlns:a16="http://schemas.microsoft.com/office/drawing/2014/main" id="{315CC5E6-7D17-46DA-8793-EAE504B4684F}"/>
               </a:ext>
             </a:extLst>
           </p:cNvPr>
@@ -11538,7 +11738,7 @@
           <p:cNvPr id="13" name="">
             <a:extLst xmlns:a="http://schemas.openxmlformats.org/drawingml/2006/main">
               <a:ext uri="{FF2B5EF4-FFF2-40B4-BE49-F238E27FC236}">
-                <a16:creationId xmlns:a16="http://schemas.microsoft.com/office/drawing/2014/main" id="{C366D8ED-211D-4A11-BED1-0011F82C5059}"/>
+                <a16:creationId xmlns:a16="http://schemas.microsoft.com/office/drawing/2014/main" id="{C82557B9-8B1F-4B9A-88D8-F20069636A90}"/>
               </a:ext>
             </a:extLst>
           </p:cNvPr>
@@ -11570,7 +11770,7 @@
           <p:cNvPr id="14" name="">
             <a:extLst xmlns:a="http://schemas.openxmlformats.org/drawingml/2006/main">
               <a:ext uri="{FF2B5EF4-FFF2-40B4-BE49-F238E27FC236}">
-                <a16:creationId xmlns:a16="http://schemas.microsoft.com/office/drawing/2014/main" id="{CD365EA7-75BA-4CC4-8FCB-F1E3A22A4362}"/>
+                <a16:creationId xmlns:a16="http://schemas.microsoft.com/office/drawing/2014/main" id="{514EC324-68C0-4F2D-AB2A-7826DC3CF511}"/>
               </a:ext>
             </a:extLst>
           </p:cNvPr>
@@ -11627,7 +11827,7 @@
           <p:cNvPr id="15" name="">
             <a:extLst xmlns:a="http://schemas.openxmlformats.org/drawingml/2006/main">
               <a:ext uri="{FF2B5EF4-FFF2-40B4-BE49-F238E27FC236}">
-                <a16:creationId xmlns:a16="http://schemas.microsoft.com/office/drawing/2014/main" id="{26A27939-EC33-49C2-BB80-AA5342AABBC2}"/>
+                <a16:creationId xmlns:a16="http://schemas.microsoft.com/office/drawing/2014/main" id="{835C9B23-68BA-4D52-A0E9-1DB0DF8AC488}"/>
               </a:ext>
             </a:extLst>
           </p:cNvPr>
@@ -11682,7 +11882,7 @@
     </p:spTree>
     <p:extLst>
       <p:ext uri="{BB962C8B-B14F-4D97-AF65-F5344CB8AC3E}">
-        <p14:creationId xmlns:p14="http://schemas.microsoft.com/office/powerpoint/2010/main" val="1804571718"/>
+        <p14:creationId xmlns:p14="http://schemas.microsoft.com/office/powerpoint/2010/main" val="154905462"/>
       </p:ext>
     </p:extLst>
   </p:cSld>
@@ -11837,7 +12037,7 @@
           <p:cNvPr id="23" name="">
             <a:extLst xmlns:a="http://schemas.openxmlformats.org/drawingml/2006/main">
               <a:ext uri="{FF2B5EF4-FFF2-40B4-BE49-F238E27FC236}">
-                <a16:creationId xmlns:a16="http://schemas.microsoft.com/office/drawing/2014/main" id="{243C61CD-AF30-4E6B-94B3-942B5FF49059}"/>
+                <a16:creationId xmlns:a16="http://schemas.microsoft.com/office/drawing/2014/main" id="{6811F080-172F-4D08-BBB1-8A6A5DDEDC8B}"/>
               </a:ext>
             </a:extLst>
           </p:cNvPr>
@@ -11869,7 +12069,7 @@
           <p:cNvPr id="2" name="">
             <a:extLst xmlns:a="http://schemas.openxmlformats.org/drawingml/2006/main">
               <a:ext uri="{FF2B5EF4-FFF2-40B4-BE49-F238E27FC236}">
-                <a16:creationId xmlns:a16="http://schemas.microsoft.com/office/drawing/2014/main" id="{46D72D77-FD54-4F0D-A59D-B531E09E7F58}"/>
+                <a16:creationId xmlns:a16="http://schemas.microsoft.com/office/drawing/2014/main" id="{89686F87-1338-4989-AB70-862068374B0B}"/>
               </a:ext>
             </a:extLst>
           </p:cNvPr>
@@ -11926,7 +12126,7 @@
           <p:cNvPr id="3" name="">
             <a:extLst xmlns:a="http://schemas.openxmlformats.org/drawingml/2006/main">
               <a:ext uri="{FF2B5EF4-FFF2-40B4-BE49-F238E27FC236}">
-                <a16:creationId xmlns:a16="http://schemas.microsoft.com/office/drawing/2014/main" id="{088B9072-659D-4294-B3D6-5AE6659F04DD}"/>
+                <a16:creationId xmlns:a16="http://schemas.microsoft.com/office/drawing/2014/main" id="{182AA7DD-13EE-40FA-B130-5D0E56F5C4EE}"/>
               </a:ext>
             </a:extLst>
           </p:cNvPr>
@@ -11958,7 +12158,7 @@
           <p:cNvPr id="4" name="">
             <a:extLst xmlns:a="http://schemas.openxmlformats.org/drawingml/2006/main">
               <a:ext uri="{FF2B5EF4-FFF2-40B4-BE49-F238E27FC236}">
-                <a16:creationId xmlns:a16="http://schemas.microsoft.com/office/drawing/2014/main" id="{052F40F3-3651-461C-8D32-F6417ED52A3F}"/>
+                <a16:creationId xmlns:a16="http://schemas.microsoft.com/office/drawing/2014/main" id="{6CBC845B-62EB-411B-8A5D-80E5A665FB3F}"/>
               </a:ext>
             </a:extLst>
           </p:cNvPr>
@@ -12015,7 +12215,7 @@
           <p:cNvPr id="5" name="">
             <a:extLst xmlns:a="http://schemas.openxmlformats.org/drawingml/2006/main">
               <a:ext uri="{FF2B5EF4-FFF2-40B4-BE49-F238E27FC236}">
-                <a16:creationId xmlns:a16="http://schemas.microsoft.com/office/drawing/2014/main" id="{939B2272-DA0A-4D2C-88B3-15FCEBCD9EFC}"/>
+                <a16:creationId xmlns:a16="http://schemas.microsoft.com/office/drawing/2014/main" id="{1EF1D402-2088-40CD-B244-4CFA675048CD}"/>
               </a:ext>
             </a:extLst>
           </p:cNvPr>
@@ -12072,7 +12272,7 @@
           <p:cNvPr id="6" name="">
             <a:extLst xmlns:a="http://schemas.openxmlformats.org/drawingml/2006/main">
               <a:ext uri="{FF2B5EF4-FFF2-40B4-BE49-F238E27FC236}">
-                <a16:creationId xmlns:a16="http://schemas.microsoft.com/office/drawing/2014/main" id="{1E1476B1-CD0D-4AA5-9E77-E716DF798D6D}"/>
+                <a16:creationId xmlns:a16="http://schemas.microsoft.com/office/drawing/2014/main" id="{7FD07D76-D429-4F06-9836-A88C2904329B}"/>
               </a:ext>
             </a:extLst>
           </p:cNvPr>
@@ -12129,7 +12329,7 @@
           <p:cNvPr id="7" name="">
             <a:extLst xmlns:a="http://schemas.openxmlformats.org/drawingml/2006/main">
               <a:ext uri="{FF2B5EF4-FFF2-40B4-BE49-F238E27FC236}">
-                <a16:creationId xmlns:a16="http://schemas.microsoft.com/office/drawing/2014/main" id="{5ADC038F-789D-4E4C-9656-118AD8BB2184}"/>
+                <a16:creationId xmlns:a16="http://schemas.microsoft.com/office/drawing/2014/main" id="{61A670D3-81A2-4EAE-B465-491778E348C2}"/>
               </a:ext>
             </a:extLst>
           </p:cNvPr>
@@ -12161,7 +12361,7 @@
           <p:cNvPr id="8" name="">
             <a:extLst xmlns:a="http://schemas.openxmlformats.org/drawingml/2006/main">
               <a:ext uri="{FF2B5EF4-FFF2-40B4-BE49-F238E27FC236}">
-                <a16:creationId xmlns:a16="http://schemas.microsoft.com/office/drawing/2014/main" id="{AE8636A4-520A-4D72-9779-EE595E29E4BA}"/>
+                <a16:creationId xmlns:a16="http://schemas.microsoft.com/office/drawing/2014/main" id="{193045C4-EE9E-4B6C-85CB-4840CD87B05C}"/>
               </a:ext>
             </a:extLst>
           </p:cNvPr>
@@ -12218,7 +12418,7 @@
           <p:cNvPr id="9" name="">
             <a:extLst xmlns:a="http://schemas.openxmlformats.org/drawingml/2006/main">
               <a:ext uri="{FF2B5EF4-FFF2-40B4-BE49-F238E27FC236}">
-                <a16:creationId xmlns:a16="http://schemas.microsoft.com/office/drawing/2014/main" id="{C30BCD7F-18EA-45BB-9FAA-82920EFFEA84}"/>
+                <a16:creationId xmlns:a16="http://schemas.microsoft.com/office/drawing/2014/main" id="{8FCD2EC5-6B07-4EDD-88FD-8A03632F1734}"/>
               </a:ext>
             </a:extLst>
           </p:cNvPr>
@@ -12275,7 +12475,7 @@
           <p:cNvPr id="10" name="">
             <a:extLst xmlns:a="http://schemas.openxmlformats.org/drawingml/2006/main">
               <a:ext uri="{FF2B5EF4-FFF2-40B4-BE49-F238E27FC236}">
-                <a16:creationId xmlns:a16="http://schemas.microsoft.com/office/drawing/2014/main" id="{85562DAC-F737-4C53-8B78-CDD3CA6AFFCB}"/>
+                <a16:creationId xmlns:a16="http://schemas.microsoft.com/office/drawing/2014/main" id="{0F03715B-CABE-4831-91A2-1BA54BB8AC20}"/>
               </a:ext>
             </a:extLst>
           </p:cNvPr>
@@ -12309,7 +12509,7 @@
           <p:cNvPr id="11" name="">
             <a:extLst xmlns:a="http://schemas.openxmlformats.org/drawingml/2006/main">
               <a:ext uri="{FF2B5EF4-FFF2-40B4-BE49-F238E27FC236}">
-                <a16:creationId xmlns:a16="http://schemas.microsoft.com/office/drawing/2014/main" id="{18A42867-695C-488E-924A-480AC9389386}"/>
+                <a16:creationId xmlns:a16="http://schemas.microsoft.com/office/drawing/2014/main" id="{D631C7C2-0229-43E1-8AF4-A2B7A767D9D3}"/>
               </a:ext>
             </a:extLst>
           </p:cNvPr>
@@ -12341,7 +12541,7 @@
           <p:cNvPr id="12" name="">
             <a:extLst xmlns:a="http://schemas.openxmlformats.org/drawingml/2006/main">
               <a:ext uri="{FF2B5EF4-FFF2-40B4-BE49-F238E27FC236}">
-                <a16:creationId xmlns:a16="http://schemas.microsoft.com/office/drawing/2014/main" id="{3B2B04CF-B5F7-46AA-B231-00A0A5A96B6F}"/>
+                <a16:creationId xmlns:a16="http://schemas.microsoft.com/office/drawing/2014/main" id="{5CF8ACE8-EF04-4C4B-AC55-95122792E581}"/>
               </a:ext>
             </a:extLst>
           </p:cNvPr>
@@ -12398,7 +12598,7 @@
           <p:cNvPr id="13" name="">
             <a:extLst xmlns:a="http://schemas.openxmlformats.org/drawingml/2006/main">
               <a:ext uri="{FF2B5EF4-FFF2-40B4-BE49-F238E27FC236}">
-                <a16:creationId xmlns:a16="http://schemas.microsoft.com/office/drawing/2014/main" id="{6C8A1ADB-AE6B-468B-808C-D832C736FEEA}"/>
+                <a16:creationId xmlns:a16="http://schemas.microsoft.com/office/drawing/2014/main" id="{4BA54726-0EE9-4BAD-AC56-8AE8BE05F8D1}"/>
               </a:ext>
             </a:extLst>
           </p:cNvPr>
@@ -12455,7 +12655,7 @@
           <p:cNvPr id="14" name="">
             <a:extLst xmlns:a="http://schemas.openxmlformats.org/drawingml/2006/main">
               <a:ext uri="{FF2B5EF4-FFF2-40B4-BE49-F238E27FC236}">
-                <a16:creationId xmlns:a16="http://schemas.microsoft.com/office/drawing/2014/main" id="{397F67F5-98D3-4589-A8BE-9E7DF263158D}"/>
+                <a16:creationId xmlns:a16="http://schemas.microsoft.com/office/drawing/2014/main" id="{A57C612E-4544-47CA-8BCA-2AF4DEC6E215}"/>
               </a:ext>
             </a:extLst>
           </p:cNvPr>
@@ -12489,7 +12689,7 @@
           <p:cNvPr id="15" name="">
             <a:extLst xmlns:a="http://schemas.openxmlformats.org/drawingml/2006/main">
               <a:ext uri="{FF2B5EF4-FFF2-40B4-BE49-F238E27FC236}">
-                <a16:creationId xmlns:a16="http://schemas.microsoft.com/office/drawing/2014/main" id="{B63F167E-FA2B-4260-8EEC-A5622095B6A4}"/>
+                <a16:creationId xmlns:a16="http://schemas.microsoft.com/office/drawing/2014/main" id="{7BF1B9A1-79FC-4D25-958C-DA699F463E85}"/>
               </a:ext>
             </a:extLst>
           </p:cNvPr>
@@ -12521,7 +12721,7 @@
           <p:cNvPr id="16" name="">
             <a:extLst xmlns:a="http://schemas.openxmlformats.org/drawingml/2006/main">
               <a:ext uri="{FF2B5EF4-FFF2-40B4-BE49-F238E27FC236}">
-                <a16:creationId xmlns:a16="http://schemas.microsoft.com/office/drawing/2014/main" id="{A9E871FF-491F-4E8E-93FA-EFB14604B0C6}"/>
+                <a16:creationId xmlns:a16="http://schemas.microsoft.com/office/drawing/2014/main" id="{AC55F31D-5820-475B-9F9C-77708249ED80}"/>
               </a:ext>
             </a:extLst>
           </p:cNvPr>
@@ -12578,7 +12778,7 @@
           <p:cNvPr id="17" name="">
             <a:extLst xmlns:a="http://schemas.openxmlformats.org/drawingml/2006/main">
               <a:ext uri="{FF2B5EF4-FFF2-40B4-BE49-F238E27FC236}">
-                <a16:creationId xmlns:a16="http://schemas.microsoft.com/office/drawing/2014/main" id="{90D1DB00-0750-4766-873F-A395404F2A51}"/>
+                <a16:creationId xmlns:a16="http://schemas.microsoft.com/office/drawing/2014/main" id="{4B7D8BD9-D6DC-478F-9AB2-154B4AFF906D}"/>
               </a:ext>
             </a:extLst>
           </p:cNvPr>
@@ -12635,7 +12835,7 @@
           <p:cNvPr id="18" name="">
             <a:extLst xmlns:a="http://schemas.openxmlformats.org/drawingml/2006/main">
               <a:ext uri="{FF2B5EF4-FFF2-40B4-BE49-F238E27FC236}">
-                <a16:creationId xmlns:a16="http://schemas.microsoft.com/office/drawing/2014/main" id="{5DE18A92-7914-4843-96E9-96D6515BA533}"/>
+                <a16:creationId xmlns:a16="http://schemas.microsoft.com/office/drawing/2014/main" id="{A549D562-D791-4C89-B1BE-B5266506AA1D}"/>
               </a:ext>
             </a:extLst>
           </p:cNvPr>
@@ -12669,7 +12869,7 @@
           <p:cNvPr id="19" name="">
             <a:extLst xmlns:a="http://schemas.openxmlformats.org/drawingml/2006/main">
               <a:ext uri="{FF2B5EF4-FFF2-40B4-BE49-F238E27FC236}">
-                <a16:creationId xmlns:a16="http://schemas.microsoft.com/office/drawing/2014/main" id="{49FCF5D7-BE3E-42FF-A26E-C093CC71C06E}"/>
+                <a16:creationId xmlns:a16="http://schemas.microsoft.com/office/drawing/2014/main" id="{848F91F5-5C14-44D4-8AA5-4099D298D22B}"/>
               </a:ext>
             </a:extLst>
           </p:cNvPr>
@@ -12701,7 +12901,7 @@
           <p:cNvPr id="20" name="">
             <a:extLst xmlns:a="http://schemas.openxmlformats.org/drawingml/2006/main">
               <a:ext uri="{FF2B5EF4-FFF2-40B4-BE49-F238E27FC236}">
-                <a16:creationId xmlns:a16="http://schemas.microsoft.com/office/drawing/2014/main" id="{5D5141D3-0AC2-4618-A768-A78D0ED381A2}"/>
+                <a16:creationId xmlns:a16="http://schemas.microsoft.com/office/drawing/2014/main" id="{38EDEB7B-C31F-46ED-A64F-D1BEA0CB6AD2}"/>
               </a:ext>
             </a:extLst>
           </p:cNvPr>
@@ -12758,7 +12958,7 @@
           <p:cNvPr id="21" name="">
             <a:extLst xmlns:a="http://schemas.openxmlformats.org/drawingml/2006/main">
               <a:ext uri="{FF2B5EF4-FFF2-40B4-BE49-F238E27FC236}">
-                <a16:creationId xmlns:a16="http://schemas.microsoft.com/office/drawing/2014/main" id="{365C7C78-7866-4C58-B328-60EA64D2D1A5}"/>
+                <a16:creationId xmlns:a16="http://schemas.microsoft.com/office/drawing/2014/main" id="{F3B5333F-0B73-4011-9637-E751EC2B7C41}"/>
               </a:ext>
             </a:extLst>
           </p:cNvPr>
@@ -12815,7 +13015,7 @@
           <p:cNvPr id="22" name="">
             <a:extLst xmlns:a="http://schemas.openxmlformats.org/drawingml/2006/main">
               <a:ext uri="{FF2B5EF4-FFF2-40B4-BE49-F238E27FC236}">
-                <a16:creationId xmlns:a16="http://schemas.microsoft.com/office/drawing/2014/main" id="{4FFF128E-D510-485D-9EA2-D7128A5EEDFE}"/>
+                <a16:creationId xmlns:a16="http://schemas.microsoft.com/office/drawing/2014/main" id="{52B48B57-DAC2-4BF4-976C-0C6D965E53FE}"/>
               </a:ext>
             </a:extLst>
           </p:cNvPr>
@@ -12870,7 +13070,7 @@
     </p:spTree>
     <p:extLst>
       <p:ext uri="{BB962C8B-B14F-4D97-AF65-F5344CB8AC3E}">
-        <p14:creationId xmlns:p14="http://schemas.microsoft.com/office/powerpoint/2010/main" val="805689291"/>
+        <p14:creationId xmlns:p14="http://schemas.microsoft.com/office/powerpoint/2010/main" val="1947049510"/>
       </p:ext>
     </p:extLst>
   </p:cSld>
@@ -13071,7 +13271,7 @@
           <p:cNvPr id="22" name="">
             <a:extLst xmlns:a="http://schemas.openxmlformats.org/drawingml/2006/main">
               <a:ext uri="{FF2B5EF4-FFF2-40B4-BE49-F238E27FC236}">
-                <a16:creationId xmlns:a16="http://schemas.microsoft.com/office/drawing/2014/main" id="{9F2ADB2B-8886-4DC9-B1F2-A0070D06207A}"/>
+                <a16:creationId xmlns:a16="http://schemas.microsoft.com/office/drawing/2014/main" id="{39B928FF-B42C-425A-B07F-F3CF6CE3A94D}"/>
               </a:ext>
             </a:extLst>
           </p:cNvPr>
@@ -13103,7 +13303,7 @@
           <p:cNvPr id="2" name="">
             <a:extLst xmlns:a="http://schemas.openxmlformats.org/drawingml/2006/main">
               <a:ext uri="{FF2B5EF4-FFF2-40B4-BE49-F238E27FC236}">
-                <a16:creationId xmlns:a16="http://schemas.microsoft.com/office/drawing/2014/main" id="{60899051-C72D-41F8-91B7-464B5057D77D}"/>
+                <a16:creationId xmlns:a16="http://schemas.microsoft.com/office/drawing/2014/main" id="{1462A37D-F5A9-4C8F-AE35-E5B855C54FFD}"/>
               </a:ext>
             </a:extLst>
           </p:cNvPr>
@@ -13160,7 +13360,7 @@
           <p:cNvPr id="3" name="">
             <a:extLst xmlns:a="http://schemas.openxmlformats.org/drawingml/2006/main">
               <a:ext uri="{FF2B5EF4-FFF2-40B4-BE49-F238E27FC236}">
-                <a16:creationId xmlns:a16="http://schemas.microsoft.com/office/drawing/2014/main" id="{D89B34C0-2A3F-4FA0-BCF1-EA9CBACAD48D}"/>
+                <a16:creationId xmlns:a16="http://schemas.microsoft.com/office/drawing/2014/main" id="{AD2E4545-0CC9-4BBC-A65F-A70EBD06F678}"/>
               </a:ext>
             </a:extLst>
           </p:cNvPr>
@@ -13192,7 +13392,7 @@
           <p:cNvPr id="4" name="">
             <a:extLst xmlns:a="http://schemas.openxmlformats.org/drawingml/2006/main">
               <a:ext uri="{FF2B5EF4-FFF2-40B4-BE49-F238E27FC236}">
-                <a16:creationId xmlns:a16="http://schemas.microsoft.com/office/drawing/2014/main" id="{3C12C59A-DF6A-46F0-B0B2-AE6B13A9C2BE}"/>
+                <a16:creationId xmlns:a16="http://schemas.microsoft.com/office/drawing/2014/main" id="{D8D726E0-2308-43AF-88F9-EBE9A004870A}"/>
               </a:ext>
             </a:extLst>
           </p:cNvPr>
@@ -13249,7 +13449,7 @@
           <p:cNvPr id="5" name="">
             <a:extLst xmlns:a="http://schemas.openxmlformats.org/drawingml/2006/main">
               <a:ext uri="{FF2B5EF4-FFF2-40B4-BE49-F238E27FC236}">
-                <a16:creationId xmlns:a16="http://schemas.microsoft.com/office/drawing/2014/main" id="{122D1F32-C795-4172-B306-73D008821151}"/>
+                <a16:creationId xmlns:a16="http://schemas.microsoft.com/office/drawing/2014/main" id="{28B838A0-1114-46F2-A52F-3470824B2CB0}"/>
               </a:ext>
             </a:extLst>
           </p:cNvPr>
@@ -13306,7 +13506,7 @@
           <p:cNvPr id="6" name="">
             <a:extLst xmlns:a="http://schemas.openxmlformats.org/drawingml/2006/main">
               <a:ext uri="{FF2B5EF4-FFF2-40B4-BE49-F238E27FC236}">
-                <a16:creationId xmlns:a16="http://schemas.microsoft.com/office/drawing/2014/main" id="{A496B510-CACB-480C-A94B-DF0A402D4CA0}"/>
+                <a16:creationId xmlns:a16="http://schemas.microsoft.com/office/drawing/2014/main" id="{A18398BA-283B-460C-ABE3-C5FCBCCEC634}"/>
               </a:ext>
             </a:extLst>
           </p:cNvPr>
@@ -13363,7 +13563,7 @@
           <p:cNvPr id="7" name="">
             <a:extLst xmlns:a="http://schemas.openxmlformats.org/drawingml/2006/main">
               <a:ext uri="{FF2B5EF4-FFF2-40B4-BE49-F238E27FC236}">
-                <a16:creationId xmlns:a16="http://schemas.microsoft.com/office/drawing/2014/main" id="{8EE1B868-09A8-443C-9FA4-3FD26BFCC1DA}"/>
+                <a16:creationId xmlns:a16="http://schemas.microsoft.com/office/drawing/2014/main" id="{20177964-EC29-444C-B4E5-BF0990F467D8}"/>
               </a:ext>
             </a:extLst>
           </p:cNvPr>
@@ -13395,7 +13595,7 @@
           <p:cNvPr id="8" name="">
             <a:extLst xmlns:a="http://schemas.openxmlformats.org/drawingml/2006/main">
               <a:ext uri="{FF2B5EF4-FFF2-40B4-BE49-F238E27FC236}">
-                <a16:creationId xmlns:a16="http://schemas.microsoft.com/office/drawing/2014/main" id="{9140AD70-AEB4-4954-A96E-0841BB178C4D}"/>
+                <a16:creationId xmlns:a16="http://schemas.microsoft.com/office/drawing/2014/main" id="{561F7300-05D4-406E-B9CE-97118FCB68CB}"/>
               </a:ext>
             </a:extLst>
           </p:cNvPr>
@@ -13452,7 +13652,7 @@
           <p:cNvPr id="9" name="">
             <a:extLst xmlns:a="http://schemas.openxmlformats.org/drawingml/2006/main">
               <a:ext uri="{FF2B5EF4-FFF2-40B4-BE49-F238E27FC236}">
-                <a16:creationId xmlns:a16="http://schemas.microsoft.com/office/drawing/2014/main" id="{CBEA8E10-F5ED-4EF1-9F12-641A4FB85109}"/>
+                <a16:creationId xmlns:a16="http://schemas.microsoft.com/office/drawing/2014/main" id="{5615E11B-096E-4D03-B13C-BA2552ABE57B}"/>
               </a:ext>
             </a:extLst>
           </p:cNvPr>
@@ -13509,7 +13709,7 @@
           <p:cNvPr id="10" name="">
             <a:extLst xmlns:a="http://schemas.openxmlformats.org/drawingml/2006/main">
               <a:ext uri="{FF2B5EF4-FFF2-40B4-BE49-F238E27FC236}">
-                <a16:creationId xmlns:a16="http://schemas.microsoft.com/office/drawing/2014/main" id="{CD377371-F328-4DB6-89FE-82D8582120F9}"/>
+                <a16:creationId xmlns:a16="http://schemas.microsoft.com/office/drawing/2014/main" id="{96E75948-8C0E-4664-A4CA-0B2ACAEB71D8}"/>
               </a:ext>
             </a:extLst>
           </p:cNvPr>
@@ -13543,7 +13743,7 @@
           <p:cNvPr id="11" name="">
             <a:extLst xmlns:a="http://schemas.openxmlformats.org/drawingml/2006/main">
               <a:ext uri="{FF2B5EF4-FFF2-40B4-BE49-F238E27FC236}">
-                <a16:creationId xmlns:a16="http://schemas.microsoft.com/office/drawing/2014/main" id="{8EF72023-CEB0-4003-9502-F91B51835C77}"/>
+                <a16:creationId xmlns:a16="http://schemas.microsoft.com/office/drawing/2014/main" id="{73E85315-D57B-4E6D-8BB5-645B2ABA7793}"/>
               </a:ext>
             </a:extLst>
           </p:cNvPr>
@@ -13575,7 +13775,7 @@
           <p:cNvPr id="12" name="">
             <a:extLst xmlns:a="http://schemas.openxmlformats.org/drawingml/2006/main">
               <a:ext uri="{FF2B5EF4-FFF2-40B4-BE49-F238E27FC236}">
-                <a16:creationId xmlns:a16="http://schemas.microsoft.com/office/drawing/2014/main" id="{DBEE2F07-7058-4792-B412-2EDF57EDFB81}"/>
+                <a16:creationId xmlns:a16="http://schemas.microsoft.com/office/drawing/2014/main" id="{54A7AAB8-1B81-4EDB-8C76-3F95DE99E927}"/>
               </a:ext>
             </a:extLst>
           </p:cNvPr>
@@ -13632,7 +13832,7 @@
           <p:cNvPr id="13" name="">
             <a:extLst xmlns:a="http://schemas.openxmlformats.org/drawingml/2006/main">
               <a:ext uri="{FF2B5EF4-FFF2-40B4-BE49-F238E27FC236}">
-                <a16:creationId xmlns:a16="http://schemas.microsoft.com/office/drawing/2014/main" id="{A1113F78-B3DE-469F-97F8-C53AE2EA513F}"/>
+                <a16:creationId xmlns:a16="http://schemas.microsoft.com/office/drawing/2014/main" id="{3F11031B-04B7-4C09-A3E4-C13E67904A74}"/>
               </a:ext>
             </a:extLst>
           </p:cNvPr>
@@ -13689,7 +13889,7 @@
           <p:cNvPr id="14" name="">
             <a:extLst xmlns:a="http://schemas.openxmlformats.org/drawingml/2006/main">
               <a:ext uri="{FF2B5EF4-FFF2-40B4-BE49-F238E27FC236}">
-                <a16:creationId xmlns:a16="http://schemas.microsoft.com/office/drawing/2014/main" id="{223CDE5A-09F8-4248-A8F5-DE61BA249757}"/>
+                <a16:creationId xmlns:a16="http://schemas.microsoft.com/office/drawing/2014/main" id="{00960F72-16E1-4657-A398-374C611DD17D}"/>
               </a:ext>
             </a:extLst>
           </p:cNvPr>
@@ -13723,7 +13923,7 @@
           <p:cNvPr id="15" name="">
             <a:extLst xmlns:a="http://schemas.openxmlformats.org/drawingml/2006/main">
               <a:ext uri="{FF2B5EF4-FFF2-40B4-BE49-F238E27FC236}">
-                <a16:creationId xmlns:a16="http://schemas.microsoft.com/office/drawing/2014/main" id="{7AB4E327-3448-4B5D-8560-4AF405E41BBF}"/>
+                <a16:creationId xmlns:a16="http://schemas.microsoft.com/office/drawing/2014/main" id="{27F0674A-42E2-42E0-90D3-66DD54F5B214}"/>
               </a:ext>
             </a:extLst>
           </p:cNvPr>
@@ -13755,7 +13955,7 @@
           <p:cNvPr id="16" name="">
             <a:extLst xmlns:a="http://schemas.openxmlformats.org/drawingml/2006/main">
               <a:ext uri="{FF2B5EF4-FFF2-40B4-BE49-F238E27FC236}">
-                <a16:creationId xmlns:a16="http://schemas.microsoft.com/office/drawing/2014/main" id="{8FED14DC-7CA9-42C0-A866-16DD784EF69D}"/>
+                <a16:creationId xmlns:a16="http://schemas.microsoft.com/office/drawing/2014/main" id="{64EAAE87-F430-4C86-8EBB-53C411EF669C}"/>
               </a:ext>
             </a:extLst>
           </p:cNvPr>
@@ -13812,7 +14012,7 @@
           <p:cNvPr id="17" name="">
             <a:extLst xmlns:a="http://schemas.openxmlformats.org/drawingml/2006/main">
               <a:ext uri="{FF2B5EF4-FFF2-40B4-BE49-F238E27FC236}">
-                <a16:creationId xmlns:a16="http://schemas.microsoft.com/office/drawing/2014/main" id="{71FB8D5E-A5E2-40FB-8B71-FB702B4B3596}"/>
+                <a16:creationId xmlns:a16="http://schemas.microsoft.com/office/drawing/2014/main" id="{7DF4FF51-1AD8-44CE-BF6A-4BD309A05E3B}"/>
               </a:ext>
             </a:extLst>
           </p:cNvPr>
@@ -13869,7 +14069,7 @@
           <p:cNvPr id="18" name="">
             <a:extLst xmlns:a="http://schemas.openxmlformats.org/drawingml/2006/main">
               <a:ext uri="{FF2B5EF4-FFF2-40B4-BE49-F238E27FC236}">
-                <a16:creationId xmlns:a16="http://schemas.microsoft.com/office/drawing/2014/main" id="{7443E7E9-EC92-4CDC-8809-216DE53E5756}"/>
+                <a16:creationId xmlns:a16="http://schemas.microsoft.com/office/drawing/2014/main" id="{A42975E7-5BDA-41CB-867E-45B3DC715C84}"/>
               </a:ext>
             </a:extLst>
           </p:cNvPr>
@@ -13903,7 +14103,7 @@
           <p:cNvPr id="19" name="">
             <a:extLst xmlns:a="http://schemas.openxmlformats.org/drawingml/2006/main">
               <a:ext uri="{FF2B5EF4-FFF2-40B4-BE49-F238E27FC236}">
-                <a16:creationId xmlns:a16="http://schemas.microsoft.com/office/drawing/2014/main" id="{AA4D1997-12C2-4BC3-9A35-31ECE37CA5E1}"/>
+                <a16:creationId xmlns:a16="http://schemas.microsoft.com/office/drawing/2014/main" id="{5F32028A-B89A-410D-BAC5-6F403F7D62D5}"/>
               </a:ext>
             </a:extLst>
           </p:cNvPr>
@@ -13935,7 +14135,7 @@
           <p:cNvPr id="20" name="">
             <a:extLst xmlns:a="http://schemas.openxmlformats.org/drawingml/2006/main">
               <a:ext uri="{FF2B5EF4-FFF2-40B4-BE49-F238E27FC236}">
-                <a16:creationId xmlns:a16="http://schemas.microsoft.com/office/drawing/2014/main" id="{C01CF9A7-F0E9-4880-9AA4-B77D3E0EF699}"/>
+                <a16:creationId xmlns:a16="http://schemas.microsoft.com/office/drawing/2014/main" id="{9B1FCCB9-BBCD-4D7C-8A1C-0E08F8C4B3F8}"/>
               </a:ext>
             </a:extLst>
           </p:cNvPr>
@@ -13992,7 +14192,7 @@
           <p:cNvPr id="21" name="">
             <a:extLst xmlns:a="http://schemas.openxmlformats.org/drawingml/2006/main">
               <a:ext uri="{FF2B5EF4-FFF2-40B4-BE49-F238E27FC236}">
-                <a16:creationId xmlns:a16="http://schemas.microsoft.com/office/drawing/2014/main" id="{D2E7A5FB-62E4-4CAB-A295-281F5FA7DA17}"/>
+                <a16:creationId xmlns:a16="http://schemas.microsoft.com/office/drawing/2014/main" id="{34D1F80D-DCDE-4356-8BFB-62AB1D270114}"/>
               </a:ext>
             </a:extLst>
           </p:cNvPr>
@@ -14047,7 +14247,7 @@
     </p:spTree>
     <p:extLst>
       <p:ext uri="{BB962C8B-B14F-4D97-AF65-F5344CB8AC3E}">
-        <p14:creationId xmlns:p14="http://schemas.microsoft.com/office/powerpoint/2010/main" val="1161337660"/>
+        <p14:creationId xmlns:p14="http://schemas.microsoft.com/office/powerpoint/2010/main" val="140557802"/>
       </p:ext>
     </p:extLst>
   </p:cSld>
